--- a/figures/mosaic/Presentation1.pptx
+++ b/figures/mosaic/Presentation1.pptx
@@ -6,6 +6,7 @@
   </p:sldMasterIdLst>
   <p:sldIdLst>
     <p:sldId id="256" r:id="rId2"/>
+    <p:sldId id="257" r:id="rId3"/>
   </p:sldIdLst>
   <p:sldSz cx="12192000" cy="6858000"/>
   <p:notesSz cx="6858000" cy="9144000"/>
@@ -112,53 +113,45 @@
 </p:presentation>
 </file>
 
-<file path=ppt/revisionInfo.xml><?xml version="1.0" encoding="utf-8"?>
-<p1510:revInfo xmlns:a="http://schemas.openxmlformats.org/drawingml/2006/main" xmlns:r="http://schemas.openxmlformats.org/officeDocument/2006/relationships" xmlns:p1510="http://schemas.microsoft.com/office/powerpoint/2015/10/main">
-  <p1510:revLst>
-    <p1510:client id="{D16BD2F8-9796-44B2-B151-07EE76050C9D}" v="5" dt="2026-03-30T22:00:02.553"/>
-  </p1510:revLst>
-</p1510:revInfo>
-</file>
-
 <file path=ppt/changesInfos/changesInfo1.xml><?xml version="1.0" encoding="utf-8"?>
 <pc:chgInfo xmlns:a="http://schemas.openxmlformats.org/drawingml/2006/main" xmlns:r="http://schemas.openxmlformats.org/officeDocument/2006/relationships" xmlns:ac="http://schemas.microsoft.com/office/drawing/2013/main/command" xmlns:pc="http://schemas.microsoft.com/office/powerpoint/2013/main/command">
   <pc:docChgLst>
-    <pc:chgData name="David Beckwitt" userId="bdca50846bee3b35" providerId="LiveId" clId="{57D9DEFD-F524-4538-9D6E-E6BFB28CA184}"/>
-    <pc:docChg chg="undo custSel modSld">
-      <pc:chgData name="David Beckwitt" userId="bdca50846bee3b35" providerId="LiveId" clId="{57D9DEFD-F524-4538-9D6E-E6BFB28CA184}" dt="2026-03-30T22:00:02.047" v="15" actId="1076"/>
+    <pc:chgData name="David Beckwitt" userId="bdca50846bee3b35" providerId="LiveId" clId="{77C57F99-3B40-463A-9855-34DA2A8048A2}"/>
+    <pc:docChg chg="custSel addSld modSld">
+      <pc:chgData name="David Beckwitt" userId="bdca50846bee3b35" providerId="LiveId" clId="{77C57F99-3B40-463A-9855-34DA2A8048A2}" dt="2026-05-21T16:12:32.570" v="4" actId="478"/>
       <pc:docMkLst>
         <pc:docMk/>
       </pc:docMkLst>
-      <pc:sldChg chg="addSp modSp mod">
-        <pc:chgData name="David Beckwitt" userId="bdca50846bee3b35" providerId="LiveId" clId="{57D9DEFD-F524-4538-9D6E-E6BFB28CA184}" dt="2026-03-30T22:00:02.047" v="15" actId="1076"/>
+      <pc:sldChg chg="addSp delSp modSp new mod">
+        <pc:chgData name="David Beckwitt" userId="bdca50846bee3b35" providerId="LiveId" clId="{77C57F99-3B40-463A-9855-34DA2A8048A2}" dt="2026-05-21T16:12:32.570" v="4" actId="478"/>
         <pc:sldMkLst>
           <pc:docMk/>
-          <pc:sldMk cId="193401497" sldId="256"/>
+          <pc:sldMk cId="1480126713" sldId="257"/>
         </pc:sldMkLst>
-        <pc:cxnChg chg="add mod">
-          <ac:chgData name="David Beckwitt" userId="bdca50846bee3b35" providerId="LiveId" clId="{57D9DEFD-F524-4538-9D6E-E6BFB28CA184}" dt="2026-03-30T22:00:00.970" v="11" actId="14100"/>
-          <ac:cxnSpMkLst>
+        <pc:spChg chg="del">
+          <ac:chgData name="David Beckwitt" userId="bdca50846bee3b35" providerId="LiveId" clId="{77C57F99-3B40-463A-9855-34DA2A8048A2}" dt="2026-05-21T16:09:20.710" v="1" actId="478"/>
+          <ac:spMkLst>
             <pc:docMk/>
-            <pc:sldMk cId="193401497" sldId="256"/>
-            <ac:cxnSpMk id="2" creationId="{0282A143-7C11-D528-4009-5F38FB168DE0}"/>
-          </ac:cxnSpMkLst>
-        </pc:cxnChg>
-        <pc:cxnChg chg="add mod">
-          <ac:chgData name="David Beckwitt" userId="bdca50846bee3b35" providerId="LiveId" clId="{57D9DEFD-F524-4538-9D6E-E6BFB28CA184}" dt="2026-03-30T22:00:02.047" v="15" actId="1076"/>
-          <ac:cxnSpMkLst>
+            <pc:sldMk cId="1480126713" sldId="257"/>
+            <ac:spMk id="2" creationId="{65910E3C-8BCA-0050-0864-1BAD3B2B3AC6}"/>
+          </ac:spMkLst>
+        </pc:spChg>
+        <pc:spChg chg="del">
+          <ac:chgData name="David Beckwitt" userId="bdca50846bee3b35" providerId="LiveId" clId="{77C57F99-3B40-463A-9855-34DA2A8048A2}" dt="2026-05-21T16:09:20.710" v="1" actId="478"/>
+          <ac:spMkLst>
             <pc:docMk/>
-            <pc:sldMk cId="193401497" sldId="256"/>
-            <ac:cxnSpMk id="4" creationId="{EC1E80E2-9D85-18F3-04E1-C0320A11D8F8}"/>
-          </ac:cxnSpMkLst>
-        </pc:cxnChg>
-        <pc:cxnChg chg="add mod">
-          <ac:chgData name="David Beckwitt" userId="bdca50846bee3b35" providerId="LiveId" clId="{57D9DEFD-F524-4538-9D6E-E6BFB28CA184}" dt="2026-03-30T22:00:01.538" v="14" actId="1076"/>
-          <ac:cxnSpMkLst>
+            <pc:sldMk cId="1480126713" sldId="257"/>
+            <ac:spMk id="3" creationId="{7EC09764-BDA1-84B6-EBF8-D6B1A930C8E7}"/>
+          </ac:spMkLst>
+        </pc:spChg>
+        <pc:picChg chg="add del mod">
+          <ac:chgData name="David Beckwitt" userId="bdca50846bee3b35" providerId="LiveId" clId="{77C57F99-3B40-463A-9855-34DA2A8048A2}" dt="2026-05-21T16:12:32.570" v="4" actId="478"/>
+          <ac:picMkLst>
             <pc:docMk/>
-            <pc:sldMk cId="193401497" sldId="256"/>
-            <ac:cxnSpMk id="5" creationId="{A8A7BA03-00C5-C21B-EEE1-795CBD6BD8B0}"/>
-          </ac:cxnSpMkLst>
-        </pc:cxnChg>
+            <pc:sldMk cId="1480126713" sldId="257"/>
+            <ac:picMk id="5" creationId="{AD857C23-0465-5343-2967-DC572475048A}"/>
+          </ac:picMkLst>
+        </pc:picChg>
       </pc:sldChg>
     </pc:docChg>
   </pc:docChgLst>
@@ -312,7 +305,7 @@
           <a:p>
             <a:fld id="{A4AAC1D5-CE9F-46E2-B0D3-6285187F5442}" type="datetimeFigureOut">
               <a:rPr lang="en-US" smtClean="0"/>
-              <a:t>3/30/2026</a:t>
+              <a:t>5/21/2026</a:t>
             </a:fld>
             <a:endParaRPr lang="en-US"/>
           </a:p>
@@ -510,7 +503,7 @@
           <a:p>
             <a:fld id="{A4AAC1D5-CE9F-46E2-B0D3-6285187F5442}" type="datetimeFigureOut">
               <a:rPr lang="en-US" smtClean="0"/>
-              <a:t>3/30/2026</a:t>
+              <a:t>5/21/2026</a:t>
             </a:fld>
             <a:endParaRPr lang="en-US"/>
           </a:p>
@@ -718,7 +711,7 @@
           <a:p>
             <a:fld id="{A4AAC1D5-CE9F-46E2-B0D3-6285187F5442}" type="datetimeFigureOut">
               <a:rPr lang="en-US" smtClean="0"/>
-              <a:t>3/30/2026</a:t>
+              <a:t>5/21/2026</a:t>
             </a:fld>
             <a:endParaRPr lang="en-US"/>
           </a:p>
@@ -916,7 +909,7 @@
           <a:p>
             <a:fld id="{A4AAC1D5-CE9F-46E2-B0D3-6285187F5442}" type="datetimeFigureOut">
               <a:rPr lang="en-US" smtClean="0"/>
-              <a:t>3/30/2026</a:t>
+              <a:t>5/21/2026</a:t>
             </a:fld>
             <a:endParaRPr lang="en-US"/>
           </a:p>
@@ -1191,7 +1184,7 @@
           <a:p>
             <a:fld id="{A4AAC1D5-CE9F-46E2-B0D3-6285187F5442}" type="datetimeFigureOut">
               <a:rPr lang="en-US" smtClean="0"/>
-              <a:t>3/30/2026</a:t>
+              <a:t>5/21/2026</a:t>
             </a:fld>
             <a:endParaRPr lang="en-US"/>
           </a:p>
@@ -1456,7 +1449,7 @@
           <a:p>
             <a:fld id="{A4AAC1D5-CE9F-46E2-B0D3-6285187F5442}" type="datetimeFigureOut">
               <a:rPr lang="en-US" smtClean="0"/>
-              <a:t>3/30/2026</a:t>
+              <a:t>5/21/2026</a:t>
             </a:fld>
             <a:endParaRPr lang="en-US"/>
           </a:p>
@@ -1868,7 +1861,7 @@
           <a:p>
             <a:fld id="{A4AAC1D5-CE9F-46E2-B0D3-6285187F5442}" type="datetimeFigureOut">
               <a:rPr lang="en-US" smtClean="0"/>
-              <a:t>3/30/2026</a:t>
+              <a:t>5/21/2026</a:t>
             </a:fld>
             <a:endParaRPr lang="en-US"/>
           </a:p>
@@ -2009,7 +2002,7 @@
           <a:p>
             <a:fld id="{A4AAC1D5-CE9F-46E2-B0D3-6285187F5442}" type="datetimeFigureOut">
               <a:rPr lang="en-US" smtClean="0"/>
-              <a:t>3/30/2026</a:t>
+              <a:t>5/21/2026</a:t>
             </a:fld>
             <a:endParaRPr lang="en-US"/>
           </a:p>
@@ -2122,7 +2115,7 @@
           <a:p>
             <a:fld id="{A4AAC1D5-CE9F-46E2-B0D3-6285187F5442}" type="datetimeFigureOut">
               <a:rPr lang="en-US" smtClean="0"/>
-              <a:t>3/30/2026</a:t>
+              <a:t>5/21/2026</a:t>
             </a:fld>
             <a:endParaRPr lang="en-US"/>
           </a:p>
@@ -2433,7 +2426,7 @@
           <a:p>
             <a:fld id="{A4AAC1D5-CE9F-46E2-B0D3-6285187F5442}" type="datetimeFigureOut">
               <a:rPr lang="en-US" smtClean="0"/>
-              <a:t>3/30/2026</a:t>
+              <a:t>5/21/2026</a:t>
             </a:fld>
             <a:endParaRPr lang="en-US"/>
           </a:p>
@@ -2721,7 +2714,7 @@
           <a:p>
             <a:fld id="{A4AAC1D5-CE9F-46E2-B0D3-6285187F5442}" type="datetimeFigureOut">
               <a:rPr lang="en-US" smtClean="0"/>
-              <a:t>3/30/2026</a:t>
+              <a:t>5/21/2026</a:t>
             </a:fld>
             <a:endParaRPr lang="en-US"/>
           </a:p>
@@ -2962,7 +2955,7 @@
           <a:p>
             <a:fld id="{A4AAC1D5-CE9F-46E2-B0D3-6285187F5442}" type="datetimeFigureOut">
               <a:rPr lang="en-US" smtClean="0"/>
-              <a:t>3/30/2026</a:t>
+              <a:t>5/21/2026</a:t>
             </a:fld>
             <a:endParaRPr lang="en-US"/>
           </a:p>
@@ -3987,6 +3980,36 @@
 </p:sld>
 </file>
 
+<file path=ppt/slides/slide2.xml><?xml version="1.0" encoding="utf-8"?>
+<p:sld xmlns:a="http://schemas.openxmlformats.org/drawingml/2006/main" xmlns:r="http://schemas.openxmlformats.org/officeDocument/2006/relationships" xmlns:p="http://schemas.openxmlformats.org/presentationml/2006/main">
+  <p:cSld>
+    <p:spTree>
+      <p:nvGrpSpPr>
+        <p:cNvPr id="1" name=""/>
+        <p:cNvGrpSpPr/>
+        <p:nvPr/>
+      </p:nvGrpSpPr>
+      <p:grpSpPr>
+        <a:xfrm>
+          <a:off x="0" y="0"/>
+          <a:ext cx="0" cy="0"/>
+          <a:chOff x="0" y="0"/>
+          <a:chExt cx="0" cy="0"/>
+        </a:xfrm>
+      </p:grpSpPr>
+    </p:spTree>
+    <p:extLst>
+      <p:ext uri="{BB962C8B-B14F-4D97-AF65-F5344CB8AC3E}">
+        <p14:creationId xmlns:p14="http://schemas.microsoft.com/office/powerpoint/2010/main" val="1480126713"/>
+      </p:ext>
+    </p:extLst>
+  </p:cSld>
+  <p:clrMapOvr>
+    <a:masterClrMapping/>
+  </p:clrMapOvr>
+</p:sld>
+</file>
+
 <file path=ppt/theme/theme1.xml><?xml version="1.0" encoding="utf-8"?>
 <a:theme xmlns:a="http://schemas.openxmlformats.org/drawingml/2006/main" name="Office Theme">
   <a:themeElements>

--- a/figures/mosaic/Presentation1.pptx
+++ b/figures/mosaic/Presentation1.pptx
@@ -113,17 +113,176 @@
 </p:presentation>
 </file>
 
+<file path=ppt/revisionInfo.xml><?xml version="1.0" encoding="utf-8"?>
+<p1510:revInfo xmlns:a="http://schemas.openxmlformats.org/drawingml/2006/main" xmlns:r="http://schemas.openxmlformats.org/officeDocument/2006/relationships" xmlns:p1510="http://schemas.microsoft.com/office/powerpoint/2015/10/main">
+  <p1510:revLst>
+    <p1510:client id="{4EA3F769-6A7E-4D75-9FB8-D0A0F467EE0F}" v="107" dt="2026-05-22T17:09:07.515"/>
+  </p1510:revLst>
+</p1510:revInfo>
+</file>
+
 <file path=ppt/changesInfos/changesInfo1.xml><?xml version="1.0" encoding="utf-8"?>
 <pc:chgInfo xmlns:a="http://schemas.openxmlformats.org/drawingml/2006/main" xmlns:r="http://schemas.openxmlformats.org/officeDocument/2006/relationships" xmlns:ac="http://schemas.microsoft.com/office/drawing/2013/main/command" xmlns:pc="http://schemas.microsoft.com/office/powerpoint/2013/main/command">
   <pc:docChgLst>
     <pc:chgData name="David Beckwitt" userId="bdca50846bee3b35" providerId="LiveId" clId="{77C57F99-3B40-463A-9855-34DA2A8048A2}"/>
-    <pc:docChg chg="custSel addSld modSld">
-      <pc:chgData name="David Beckwitt" userId="bdca50846bee3b35" providerId="LiveId" clId="{77C57F99-3B40-463A-9855-34DA2A8048A2}" dt="2026-05-21T16:12:32.570" v="4" actId="478"/>
+    <pc:docChg chg="custSel addSld delSld modSld">
+      <pc:chgData name="David Beckwitt" userId="bdca50846bee3b35" providerId="LiveId" clId="{77C57F99-3B40-463A-9855-34DA2A8048A2}" dt="2026-05-22T17:09:51.557" v="316" actId="1037"/>
       <pc:docMkLst>
         <pc:docMk/>
       </pc:docMkLst>
+      <pc:sldChg chg="addSp delSp modSp mod">
+        <pc:chgData name="David Beckwitt" userId="bdca50846bee3b35" providerId="LiveId" clId="{77C57F99-3B40-463A-9855-34DA2A8048A2}" dt="2026-05-22T17:03:44.486" v="189" actId="1076"/>
+        <pc:sldMkLst>
+          <pc:docMk/>
+          <pc:sldMk cId="193401497" sldId="256"/>
+        </pc:sldMkLst>
+        <pc:spChg chg="mod">
+          <ac:chgData name="David Beckwitt" userId="bdca50846bee3b35" providerId="LiveId" clId="{77C57F99-3B40-463A-9855-34DA2A8048A2}" dt="2026-05-22T17:00:40.914" v="5" actId="1076"/>
+          <ac:spMkLst>
+            <pc:docMk/>
+            <pc:sldMk cId="193401497" sldId="256"/>
+            <ac:spMk id="8" creationId="{5F9E35B7-8418-4993-DCEC-9C13BC0784F4}"/>
+          </ac:spMkLst>
+        </pc:spChg>
+        <pc:spChg chg="mod">
+          <ac:chgData name="David Beckwitt" userId="bdca50846bee3b35" providerId="LiveId" clId="{77C57F99-3B40-463A-9855-34DA2A8048A2}" dt="2026-05-22T17:00:40.914" v="5" actId="1076"/>
+          <ac:spMkLst>
+            <pc:docMk/>
+            <pc:sldMk cId="193401497" sldId="256"/>
+            <ac:spMk id="9" creationId="{1761ACD1-97A4-7395-D90F-4F4F69B89BBF}"/>
+          </ac:spMkLst>
+        </pc:spChg>
+        <pc:spChg chg="mod">
+          <ac:chgData name="David Beckwitt" userId="bdca50846bee3b35" providerId="LiveId" clId="{77C57F99-3B40-463A-9855-34DA2A8048A2}" dt="2026-05-22T17:00:40.914" v="5" actId="1076"/>
+          <ac:spMkLst>
+            <pc:docMk/>
+            <pc:sldMk cId="193401497" sldId="256"/>
+            <ac:spMk id="10" creationId="{7F25FFE2-276E-1B56-4CCB-651E90AC1637}"/>
+          </ac:spMkLst>
+        </pc:spChg>
+        <pc:spChg chg="mod">
+          <ac:chgData name="David Beckwitt" userId="bdca50846bee3b35" providerId="LiveId" clId="{77C57F99-3B40-463A-9855-34DA2A8048A2}" dt="2026-05-22T17:00:40.914" v="5" actId="1076"/>
+          <ac:spMkLst>
+            <pc:docMk/>
+            <pc:sldMk cId="193401497" sldId="256"/>
+            <ac:spMk id="11" creationId="{4BEF3B6C-6A99-23CF-C124-3BE282F923EB}"/>
+          </ac:spMkLst>
+        </pc:spChg>
+        <pc:spChg chg="mod">
+          <ac:chgData name="David Beckwitt" userId="bdca50846bee3b35" providerId="LiveId" clId="{77C57F99-3B40-463A-9855-34DA2A8048A2}" dt="2026-05-22T17:00:40.914" v="5" actId="1076"/>
+          <ac:spMkLst>
+            <pc:docMk/>
+            <pc:sldMk cId="193401497" sldId="256"/>
+            <ac:spMk id="17" creationId="{A5698F77-EC7A-7500-BA89-26B5D8B08236}"/>
+          </ac:spMkLst>
+        </pc:spChg>
+        <pc:spChg chg="mod">
+          <ac:chgData name="David Beckwitt" userId="bdca50846bee3b35" providerId="LiveId" clId="{77C57F99-3B40-463A-9855-34DA2A8048A2}" dt="2026-05-22T17:00:40.914" v="5" actId="1076"/>
+          <ac:spMkLst>
+            <pc:docMk/>
+            <pc:sldMk cId="193401497" sldId="256"/>
+            <ac:spMk id="18" creationId="{53C7651F-0561-43A5-2C7E-EB9F56D26062}"/>
+          </ac:spMkLst>
+        </pc:spChg>
+        <pc:spChg chg="add mod">
+          <ac:chgData name="David Beckwitt" userId="bdca50846bee3b35" providerId="LiveId" clId="{77C57F99-3B40-463A-9855-34DA2A8048A2}" dt="2026-05-22T17:02:54.587" v="109" actId="207"/>
+          <ac:spMkLst>
+            <pc:docMk/>
+            <pc:sldMk cId="193401497" sldId="256"/>
+            <ac:spMk id="21" creationId="{BDEEEF72-8384-0F19-4EC5-1CC1F01A008E}"/>
+          </ac:spMkLst>
+        </pc:spChg>
+        <pc:spChg chg="add mod">
+          <ac:chgData name="David Beckwitt" userId="bdca50846bee3b35" providerId="LiveId" clId="{77C57F99-3B40-463A-9855-34DA2A8048A2}" dt="2026-05-22T17:03:21.666" v="163" actId="1076"/>
+          <ac:spMkLst>
+            <pc:docMk/>
+            <pc:sldMk cId="193401497" sldId="256"/>
+            <ac:spMk id="22" creationId="{119F4701-C2DA-3DED-FE99-0A20920E0D26}"/>
+          </ac:spMkLst>
+        </pc:spChg>
+        <pc:spChg chg="add mod">
+          <ac:chgData name="David Beckwitt" userId="bdca50846bee3b35" providerId="LiveId" clId="{77C57F99-3B40-463A-9855-34DA2A8048A2}" dt="2026-05-22T17:03:44.486" v="189" actId="1076"/>
+          <ac:spMkLst>
+            <pc:docMk/>
+            <pc:sldMk cId="193401497" sldId="256"/>
+            <ac:spMk id="23" creationId="{98391F30-547F-6A10-AAE6-EFF435098E15}"/>
+          </ac:spMkLst>
+        </pc:spChg>
+        <pc:picChg chg="add mod">
+          <ac:chgData name="David Beckwitt" userId="bdca50846bee3b35" providerId="LiveId" clId="{77C57F99-3B40-463A-9855-34DA2A8048A2}" dt="2026-05-22T17:00:43.127" v="8" actId="1076"/>
+          <ac:picMkLst>
+            <pc:docMk/>
+            <pc:sldMk cId="193401497" sldId="256"/>
+            <ac:picMk id="4" creationId="{0339FB3F-3274-698B-10CD-7A7DDFD015E1}"/>
+          </ac:picMkLst>
+        </pc:picChg>
+        <pc:picChg chg="mod">
+          <ac:chgData name="David Beckwitt" userId="bdca50846bee3b35" providerId="LiveId" clId="{77C57F99-3B40-463A-9855-34DA2A8048A2}" dt="2026-05-22T17:00:40.914" v="5" actId="1076"/>
+          <ac:picMkLst>
+            <pc:docMk/>
+            <pc:sldMk cId="193401497" sldId="256"/>
+            <ac:picMk id="7" creationId="{3CC1235A-5E43-89F5-6F72-B3A24CDF848D}"/>
+          </ac:picMkLst>
+        </pc:picChg>
+        <pc:cxnChg chg="mod">
+          <ac:chgData name="David Beckwitt" userId="bdca50846bee3b35" providerId="LiveId" clId="{77C57F99-3B40-463A-9855-34DA2A8048A2}" dt="2026-05-22T17:00:40.914" v="5" actId="1076"/>
+          <ac:cxnSpMkLst>
+            <pc:docMk/>
+            <pc:sldMk cId="193401497" sldId="256"/>
+            <ac:cxnSpMk id="2" creationId="{0282A143-7C11-D528-4009-5F38FB168DE0}"/>
+          </ac:cxnSpMkLst>
+        </pc:cxnChg>
+        <pc:cxnChg chg="add mod">
+          <ac:chgData name="David Beckwitt" userId="bdca50846bee3b35" providerId="LiveId" clId="{77C57F99-3B40-463A-9855-34DA2A8048A2}" dt="2026-05-22T17:01:03.015" v="11" actId="693"/>
+          <ac:cxnSpMkLst>
+            <pc:docMk/>
+            <pc:sldMk cId="193401497" sldId="256"/>
+            <ac:cxnSpMk id="6" creationId="{99E8BD74-B732-F98C-DCE6-E201B31DD7CB}"/>
+          </ac:cxnSpMkLst>
+        </pc:cxnChg>
+        <pc:cxnChg chg="mod">
+          <ac:chgData name="David Beckwitt" userId="bdca50846bee3b35" providerId="LiveId" clId="{77C57F99-3B40-463A-9855-34DA2A8048A2}" dt="2026-05-22T17:00:40.914" v="5" actId="1076"/>
+          <ac:cxnSpMkLst>
+            <pc:docMk/>
+            <pc:sldMk cId="193401497" sldId="256"/>
+            <ac:cxnSpMk id="13" creationId="{ED7CB557-85BC-D489-91F1-160BAC6C3ED3}"/>
+          </ac:cxnSpMkLst>
+        </pc:cxnChg>
+        <pc:cxnChg chg="mod">
+          <ac:chgData name="David Beckwitt" userId="bdca50846bee3b35" providerId="LiveId" clId="{77C57F99-3B40-463A-9855-34DA2A8048A2}" dt="2026-05-22T17:00:40.914" v="5" actId="1076"/>
+          <ac:cxnSpMkLst>
+            <pc:docMk/>
+            <pc:sldMk cId="193401497" sldId="256"/>
+            <ac:cxnSpMk id="14" creationId="{68B11892-C12D-4C8B-E0B9-8593B582C359}"/>
+          </ac:cxnSpMkLst>
+        </pc:cxnChg>
+        <pc:cxnChg chg="add mod">
+          <ac:chgData name="David Beckwitt" userId="bdca50846bee3b35" providerId="LiveId" clId="{77C57F99-3B40-463A-9855-34DA2A8048A2}" dt="2026-05-22T17:01:26.916" v="15" actId="13822"/>
+          <ac:cxnSpMkLst>
+            <pc:docMk/>
+            <pc:sldMk cId="193401497" sldId="256"/>
+            <ac:cxnSpMk id="15" creationId="{4540F94B-4F20-8F72-5F74-7971143BF542}"/>
+          </ac:cxnSpMkLst>
+        </pc:cxnChg>
+        <pc:cxnChg chg="add del mod">
+          <ac:chgData name="David Beckwitt" userId="bdca50846bee3b35" providerId="LiveId" clId="{77C57F99-3B40-463A-9855-34DA2A8048A2}" dt="2026-05-22T17:01:18.458" v="14" actId="478"/>
+          <ac:cxnSpMkLst>
+            <pc:docMk/>
+            <pc:sldMk cId="193401497" sldId="256"/>
+            <ac:cxnSpMk id="16" creationId="{3A861791-9013-E7BD-C886-CC8821747D65}"/>
+          </ac:cxnSpMkLst>
+        </pc:cxnChg>
+        <pc:cxnChg chg="add mod">
+          <ac:chgData name="David Beckwitt" userId="bdca50846bee3b35" providerId="LiveId" clId="{77C57F99-3B40-463A-9855-34DA2A8048A2}" dt="2026-05-22T17:01:33.186" v="19" actId="1076"/>
+          <ac:cxnSpMkLst>
+            <pc:docMk/>
+            <pc:sldMk cId="193401497" sldId="256"/>
+            <ac:cxnSpMk id="19" creationId="{9B7AEBCB-3151-61B0-29CC-81DF2581F0EE}"/>
+          </ac:cxnSpMkLst>
+        </pc:cxnChg>
+      </pc:sldChg>
       <pc:sldChg chg="addSp delSp modSp new mod">
-        <pc:chgData name="David Beckwitt" userId="bdca50846bee3b35" providerId="LiveId" clId="{77C57F99-3B40-463A-9855-34DA2A8048A2}" dt="2026-05-21T16:12:32.570" v="4" actId="478"/>
+        <pc:chgData name="David Beckwitt" userId="bdca50846bee3b35" providerId="LiveId" clId="{77C57F99-3B40-463A-9855-34DA2A8048A2}" dt="2026-05-22T17:09:51.557" v="316" actId="1037"/>
         <pc:sldMkLst>
           <pc:docMk/>
           <pc:sldMk cId="1480126713" sldId="257"/>
@@ -144,6 +303,14 @@
             <ac:spMk id="3" creationId="{7EC09764-BDA1-84B6-EBF8-D6B1A930C8E7}"/>
           </ac:spMkLst>
         </pc:spChg>
+        <pc:picChg chg="add mod">
+          <ac:chgData name="David Beckwitt" userId="bdca50846bee3b35" providerId="LiveId" clId="{77C57F99-3B40-463A-9855-34DA2A8048A2}" dt="2026-05-22T17:06:28.986" v="191"/>
+          <ac:picMkLst>
+            <pc:docMk/>
+            <pc:sldMk cId="1480126713" sldId="257"/>
+            <ac:picMk id="3" creationId="{FA3E60ED-0DA0-7132-6A0A-03970DE9FFD5}"/>
+          </ac:picMkLst>
+        </pc:picChg>
         <pc:picChg chg="add del mod">
           <ac:chgData name="David Beckwitt" userId="bdca50846bee3b35" providerId="LiveId" clId="{77C57F99-3B40-463A-9855-34DA2A8048A2}" dt="2026-05-21T16:12:32.570" v="4" actId="478"/>
           <ac:picMkLst>
@@ -152,6 +319,133 @@
             <ac:picMk id="5" creationId="{AD857C23-0465-5343-2967-DC572475048A}"/>
           </ac:picMkLst>
         </pc:picChg>
+        <pc:cxnChg chg="add mod">
+          <ac:chgData name="David Beckwitt" userId="bdca50846bee3b35" providerId="LiveId" clId="{77C57F99-3B40-463A-9855-34DA2A8048A2}" dt="2026-05-22T17:09:23.846" v="297" actId="693"/>
+          <ac:cxnSpMkLst>
+            <pc:docMk/>
+            <pc:sldMk cId="1480126713" sldId="257"/>
+            <ac:cxnSpMk id="5" creationId="{123316F3-25BB-254A-094B-0248AEDA554A}"/>
+          </ac:cxnSpMkLst>
+        </pc:cxnChg>
+        <pc:cxnChg chg="add mod">
+          <ac:chgData name="David Beckwitt" userId="bdca50846bee3b35" providerId="LiveId" clId="{77C57F99-3B40-463A-9855-34DA2A8048A2}" dt="2026-05-22T17:09:23.846" v="297" actId="693"/>
+          <ac:cxnSpMkLst>
+            <pc:docMk/>
+            <pc:sldMk cId="1480126713" sldId="257"/>
+            <ac:cxnSpMk id="6" creationId="{4F40CFE6-98EA-1925-7900-CCAA0C1B93B2}"/>
+          </ac:cxnSpMkLst>
+        </pc:cxnChg>
+        <pc:cxnChg chg="add mod">
+          <ac:chgData name="David Beckwitt" userId="bdca50846bee3b35" providerId="LiveId" clId="{77C57F99-3B40-463A-9855-34DA2A8048A2}" dt="2026-05-22T17:09:23.846" v="297" actId="693"/>
+          <ac:cxnSpMkLst>
+            <pc:docMk/>
+            <pc:sldMk cId="1480126713" sldId="257"/>
+            <ac:cxnSpMk id="7" creationId="{856EFE5B-777A-4D52-29DC-A969C917C479}"/>
+          </ac:cxnSpMkLst>
+        </pc:cxnChg>
+        <pc:cxnChg chg="add mod">
+          <ac:chgData name="David Beckwitt" userId="bdca50846bee3b35" providerId="LiveId" clId="{77C57F99-3B40-463A-9855-34DA2A8048A2}" dt="2026-05-22T17:09:43.646" v="311" actId="14100"/>
+          <ac:cxnSpMkLst>
+            <pc:docMk/>
+            <pc:sldMk cId="1480126713" sldId="257"/>
+            <ac:cxnSpMk id="8" creationId="{82D65512-12D5-343F-6715-9B5CF849DA76}"/>
+          </ac:cxnSpMkLst>
+        </pc:cxnChg>
+        <pc:cxnChg chg="add mod">
+          <ac:chgData name="David Beckwitt" userId="bdca50846bee3b35" providerId="LiveId" clId="{77C57F99-3B40-463A-9855-34DA2A8048A2}" dt="2026-05-22T17:09:37.519" v="301" actId="1037"/>
+          <ac:cxnSpMkLst>
+            <pc:docMk/>
+            <pc:sldMk cId="1480126713" sldId="257"/>
+            <ac:cxnSpMk id="10" creationId="{184D6841-3F37-2B8A-C3DB-873E2C4199E4}"/>
+          </ac:cxnSpMkLst>
+        </pc:cxnChg>
+        <pc:cxnChg chg="add mod">
+          <ac:chgData name="David Beckwitt" userId="bdca50846bee3b35" providerId="LiveId" clId="{77C57F99-3B40-463A-9855-34DA2A8048A2}" dt="2026-05-22T17:07:22.097" v="215" actId="1035"/>
+          <ac:cxnSpMkLst>
+            <pc:docMk/>
+            <pc:sldMk cId="1480126713" sldId="257"/>
+            <ac:cxnSpMk id="11" creationId="{46B167F0-DEBC-CA65-9130-27538F452A9D}"/>
+          </ac:cxnSpMkLst>
+        </pc:cxnChg>
+        <pc:cxnChg chg="add mod">
+          <ac:chgData name="David Beckwitt" userId="bdca50846bee3b35" providerId="LiveId" clId="{77C57F99-3B40-463A-9855-34DA2A8048A2}" dt="2026-05-22T17:09:51.557" v="316" actId="1037"/>
+          <ac:cxnSpMkLst>
+            <pc:docMk/>
+            <pc:sldMk cId="1480126713" sldId="257"/>
+            <ac:cxnSpMk id="13" creationId="{872899B0-D4C3-B788-274A-0D6D6FF92E8C}"/>
+          </ac:cxnSpMkLst>
+        </pc:cxnChg>
+        <pc:cxnChg chg="add mod">
+          <ac:chgData name="David Beckwitt" userId="bdca50846bee3b35" providerId="LiveId" clId="{77C57F99-3B40-463A-9855-34DA2A8048A2}" dt="2026-05-22T17:07:42.889" v="230" actId="14100"/>
+          <ac:cxnSpMkLst>
+            <pc:docMk/>
+            <pc:sldMk cId="1480126713" sldId="257"/>
+            <ac:cxnSpMk id="15" creationId="{C91BCE6C-A3C6-848C-A969-AE32BE330A39}"/>
+          </ac:cxnSpMkLst>
+        </pc:cxnChg>
+        <pc:cxnChg chg="add mod">
+          <ac:chgData name="David Beckwitt" userId="bdca50846bee3b35" providerId="LiveId" clId="{77C57F99-3B40-463A-9855-34DA2A8048A2}" dt="2026-05-22T17:07:57.749" v="246" actId="14100"/>
+          <ac:cxnSpMkLst>
+            <pc:docMk/>
+            <pc:sldMk cId="1480126713" sldId="257"/>
+            <ac:cxnSpMk id="17" creationId="{ACC85DB0-F8D0-896F-4785-2843E00F102B}"/>
+          </ac:cxnSpMkLst>
+        </pc:cxnChg>
+        <pc:cxnChg chg="add mod">
+          <ac:chgData name="David Beckwitt" userId="bdca50846bee3b35" providerId="LiveId" clId="{77C57F99-3B40-463A-9855-34DA2A8048A2}" dt="2026-05-22T17:09:05.149" v="294" actId="693"/>
+          <ac:cxnSpMkLst>
+            <pc:docMk/>
+            <pc:sldMk cId="1480126713" sldId="257"/>
+            <ac:cxnSpMk id="20" creationId="{E023FB43-DF49-4607-A9E1-809EF8F5A87E}"/>
+          </ac:cxnSpMkLst>
+        </pc:cxnChg>
+        <pc:cxnChg chg="add mod">
+          <ac:chgData name="David Beckwitt" userId="bdca50846bee3b35" providerId="LiveId" clId="{77C57F99-3B40-463A-9855-34DA2A8048A2}" dt="2026-05-22T17:09:05.149" v="294" actId="693"/>
+          <ac:cxnSpMkLst>
+            <pc:docMk/>
+            <pc:sldMk cId="1480126713" sldId="257"/>
+            <ac:cxnSpMk id="21" creationId="{0CFFC1C2-F07F-FE0E-A07E-0C67D111BDEE}"/>
+          </ac:cxnSpMkLst>
+        </pc:cxnChg>
+        <pc:cxnChg chg="add mod">
+          <ac:chgData name="David Beckwitt" userId="bdca50846bee3b35" providerId="LiveId" clId="{77C57F99-3B40-463A-9855-34DA2A8048A2}" dt="2026-05-22T17:09:05.149" v="294" actId="693"/>
+          <ac:cxnSpMkLst>
+            <pc:docMk/>
+            <pc:sldMk cId="1480126713" sldId="257"/>
+            <ac:cxnSpMk id="22" creationId="{A24B4914-E2F2-A401-D9EE-27A3036B8CC8}"/>
+          </ac:cxnSpMkLst>
+        </pc:cxnChg>
+        <pc:cxnChg chg="add mod">
+          <ac:chgData name="David Beckwitt" userId="bdca50846bee3b35" providerId="LiveId" clId="{77C57F99-3B40-463A-9855-34DA2A8048A2}" dt="2026-05-22T17:09:05.149" v="294" actId="693"/>
+          <ac:cxnSpMkLst>
+            <pc:docMk/>
+            <pc:sldMk cId="1480126713" sldId="257"/>
+            <ac:cxnSpMk id="23" creationId="{5A5C705B-CEF2-1E00-787D-F5A7DB080AE6}"/>
+          </ac:cxnSpMkLst>
+        </pc:cxnChg>
+        <pc:cxnChg chg="add mod">
+          <ac:chgData name="David Beckwitt" userId="bdca50846bee3b35" providerId="LiveId" clId="{77C57F99-3B40-463A-9855-34DA2A8048A2}" dt="2026-05-22T17:09:05.149" v="294" actId="693"/>
+          <ac:cxnSpMkLst>
+            <pc:docMk/>
+            <pc:sldMk cId="1480126713" sldId="257"/>
+            <ac:cxnSpMk id="24" creationId="{BBBD510A-E1B2-27D5-FADE-AFE6E07526BE}"/>
+          </ac:cxnSpMkLst>
+        </pc:cxnChg>
+        <pc:cxnChg chg="add mod">
+          <ac:chgData name="David Beckwitt" userId="bdca50846bee3b35" providerId="LiveId" clId="{77C57F99-3B40-463A-9855-34DA2A8048A2}" dt="2026-05-22T17:09:09.759" v="296" actId="1076"/>
+          <ac:cxnSpMkLst>
+            <pc:docMk/>
+            <pc:sldMk cId="1480126713" sldId="257"/>
+            <ac:cxnSpMk id="26" creationId="{80E18C60-09C0-6779-3E47-3DCAB8275251}"/>
+          </ac:cxnSpMkLst>
+        </pc:cxnChg>
+      </pc:sldChg>
+      <pc:sldChg chg="new del">
+        <pc:chgData name="David Beckwitt" userId="bdca50846bee3b35" providerId="LiveId" clId="{77C57F99-3B40-463A-9855-34DA2A8048A2}" dt="2026-05-22T17:03:33.446" v="179" actId="47"/>
+        <pc:sldMkLst>
+          <pc:docMk/>
+          <pc:sldMk cId="1502120602" sldId="258"/>
+        </pc:sldMkLst>
       </pc:sldChg>
     </pc:docChg>
   </pc:docChgLst>
@@ -305,7 +599,7 @@
           <a:p>
             <a:fld id="{A4AAC1D5-CE9F-46E2-B0D3-6285187F5442}" type="datetimeFigureOut">
               <a:rPr lang="en-US" smtClean="0"/>
-              <a:t>5/21/2026</a:t>
+              <a:t>5/22/2026</a:t>
             </a:fld>
             <a:endParaRPr lang="en-US"/>
           </a:p>
@@ -503,7 +797,7 @@
           <a:p>
             <a:fld id="{A4AAC1D5-CE9F-46E2-B0D3-6285187F5442}" type="datetimeFigureOut">
               <a:rPr lang="en-US" smtClean="0"/>
-              <a:t>5/21/2026</a:t>
+              <a:t>5/22/2026</a:t>
             </a:fld>
             <a:endParaRPr lang="en-US"/>
           </a:p>
@@ -711,7 +1005,7 @@
           <a:p>
             <a:fld id="{A4AAC1D5-CE9F-46E2-B0D3-6285187F5442}" type="datetimeFigureOut">
               <a:rPr lang="en-US" smtClean="0"/>
-              <a:t>5/21/2026</a:t>
+              <a:t>5/22/2026</a:t>
             </a:fld>
             <a:endParaRPr lang="en-US"/>
           </a:p>
@@ -909,7 +1203,7 @@
           <a:p>
             <a:fld id="{A4AAC1D5-CE9F-46E2-B0D3-6285187F5442}" type="datetimeFigureOut">
               <a:rPr lang="en-US" smtClean="0"/>
-              <a:t>5/21/2026</a:t>
+              <a:t>5/22/2026</a:t>
             </a:fld>
             <a:endParaRPr lang="en-US"/>
           </a:p>
@@ -1184,7 +1478,7 @@
           <a:p>
             <a:fld id="{A4AAC1D5-CE9F-46E2-B0D3-6285187F5442}" type="datetimeFigureOut">
               <a:rPr lang="en-US" smtClean="0"/>
-              <a:t>5/21/2026</a:t>
+              <a:t>5/22/2026</a:t>
             </a:fld>
             <a:endParaRPr lang="en-US"/>
           </a:p>
@@ -1449,7 +1743,7 @@
           <a:p>
             <a:fld id="{A4AAC1D5-CE9F-46E2-B0D3-6285187F5442}" type="datetimeFigureOut">
               <a:rPr lang="en-US" smtClean="0"/>
-              <a:t>5/21/2026</a:t>
+              <a:t>5/22/2026</a:t>
             </a:fld>
             <a:endParaRPr lang="en-US"/>
           </a:p>
@@ -1861,7 +2155,7 @@
           <a:p>
             <a:fld id="{A4AAC1D5-CE9F-46E2-B0D3-6285187F5442}" type="datetimeFigureOut">
               <a:rPr lang="en-US" smtClean="0"/>
-              <a:t>5/21/2026</a:t>
+              <a:t>5/22/2026</a:t>
             </a:fld>
             <a:endParaRPr lang="en-US"/>
           </a:p>
@@ -2002,7 +2296,7 @@
           <a:p>
             <a:fld id="{A4AAC1D5-CE9F-46E2-B0D3-6285187F5442}" type="datetimeFigureOut">
               <a:rPr lang="en-US" smtClean="0"/>
-              <a:t>5/21/2026</a:t>
+              <a:t>5/22/2026</a:t>
             </a:fld>
             <a:endParaRPr lang="en-US"/>
           </a:p>
@@ -2115,7 +2409,7 @@
           <a:p>
             <a:fld id="{A4AAC1D5-CE9F-46E2-B0D3-6285187F5442}" type="datetimeFigureOut">
               <a:rPr lang="en-US" smtClean="0"/>
-              <a:t>5/21/2026</a:t>
+              <a:t>5/22/2026</a:t>
             </a:fld>
             <a:endParaRPr lang="en-US"/>
           </a:p>
@@ -2426,7 +2720,7 @@
           <a:p>
             <a:fld id="{A4AAC1D5-CE9F-46E2-B0D3-6285187F5442}" type="datetimeFigureOut">
               <a:rPr lang="en-US" smtClean="0"/>
-              <a:t>5/21/2026</a:t>
+              <a:t>5/22/2026</a:t>
             </a:fld>
             <a:endParaRPr lang="en-US"/>
           </a:p>
@@ -2714,7 +3008,7 @@
           <a:p>
             <a:fld id="{A4AAC1D5-CE9F-46E2-B0D3-6285187F5442}" type="datetimeFigureOut">
               <a:rPr lang="en-US" smtClean="0"/>
-              <a:t>5/21/2026</a:t>
+              <a:t>5/22/2026</a:t>
             </a:fld>
             <a:endParaRPr lang="en-US"/>
           </a:p>
@@ -2955,7 +3249,7 @@
           <a:p>
             <a:fld id="{A4AAC1D5-CE9F-46E2-B0D3-6285187F5442}" type="datetimeFigureOut">
               <a:rPr lang="en-US" smtClean="0"/>
-              <a:t>5/21/2026</a:t>
+              <a:t>5/22/2026</a:t>
             </a:fld>
             <a:endParaRPr lang="en-US"/>
           </a:p>
@@ -3400,7 +3694,7 @@
         </p:blipFill>
         <p:spPr>
           <a:xfrm>
-            <a:off x="4917254" y="2596063"/>
+            <a:off x="880091" y="2570184"/>
             <a:ext cx="999746" cy="1499619"/>
           </a:xfrm>
           <a:prstGeom prst="rect">
@@ -3422,7 +3716,7 @@
         </p:nvSpPr>
         <p:spPr>
           <a:xfrm>
-            <a:off x="5000625" y="3008313"/>
+            <a:off x="963462" y="2982434"/>
             <a:ext cx="200025" cy="1036638"/>
           </a:xfrm>
           <a:prstGeom prst="rect">
@@ -3474,7 +3768,7 @@
         </p:nvSpPr>
         <p:spPr>
           <a:xfrm>
-            <a:off x="5619750" y="2860675"/>
+            <a:off x="1582587" y="2834796"/>
             <a:ext cx="276613" cy="1162050"/>
           </a:xfrm>
           <a:prstGeom prst="rect">
@@ -3526,7 +3820,7 @@
         </p:nvSpPr>
         <p:spPr>
           <a:xfrm>
-            <a:off x="4896772" y="2725738"/>
+            <a:off x="859609" y="2699859"/>
             <a:ext cx="320922" cy="369332"/>
           </a:xfrm>
           <a:prstGeom prst="rect">
@@ -3565,7 +3859,7 @@
         </p:nvSpPr>
         <p:spPr>
           <a:xfrm>
-            <a:off x="5518134" y="2571750"/>
+            <a:off x="1480971" y="2545871"/>
             <a:ext cx="324128" cy="369332"/>
           </a:xfrm>
           <a:prstGeom prst="rect">
@@ -3604,7 +3898,7 @@
         </p:nvCxnSpPr>
         <p:spPr>
           <a:xfrm flipV="1">
-            <a:off x="4875212" y="3681413"/>
+            <a:off x="838049" y="3655534"/>
             <a:ext cx="0" cy="414269"/>
           </a:xfrm>
           <a:prstGeom prst="straightConnector1">
@@ -3645,7 +3939,7 @@
         </p:nvCxnSpPr>
         <p:spPr>
           <a:xfrm>
-            <a:off x="4917254" y="4135369"/>
+            <a:off x="880091" y="4109490"/>
             <a:ext cx="479425" cy="0"/>
           </a:xfrm>
           <a:prstGeom prst="straightConnector1">
@@ -3686,7 +3980,7 @@
             </p:nvSpPr>
             <p:spPr>
               <a:xfrm>
-                <a:off x="4670960" y="3472265"/>
+                <a:off x="633797" y="3446386"/>
                 <a:ext cx="349904" cy="246221"/>
               </a:xfrm>
               <a:prstGeom prst="rect">
@@ -3770,7 +4064,7 @@
             </p:nvSpPr>
             <p:spPr>
               <a:xfrm>
-                <a:off x="4670960" y="3472265"/>
+                <a:off x="633797" y="3446386"/>
                 <a:ext cx="349904" cy="246221"/>
               </a:xfrm>
               <a:prstGeom prst="rect">
@@ -3814,7 +4108,7 @@
             </p:nvSpPr>
             <p:spPr>
               <a:xfrm>
-                <a:off x="5295250" y="4022725"/>
+                <a:off x="1258087" y="3996846"/>
                 <a:ext cx="350801" cy="246221"/>
               </a:xfrm>
               <a:prstGeom prst="rect">
@@ -3898,7 +4192,7 @@
             </p:nvSpPr>
             <p:spPr>
               <a:xfrm>
-                <a:off x="5295250" y="4022725"/>
+                <a:off x="1258087" y="3996846"/>
                 <a:ext cx="350801" cy="246221"/>
               </a:xfrm>
               <a:prstGeom prst="rect">
@@ -3942,7 +4236,7 @@
         </p:nvCxnSpPr>
         <p:spPr>
           <a:xfrm flipH="1">
-            <a:off x="5149850" y="3681413"/>
+            <a:off x="1112687" y="3655534"/>
             <a:ext cx="220663" cy="207134"/>
           </a:xfrm>
           <a:prstGeom prst="straightConnector1">
@@ -3967,6 +4261,381 @@
           </a:fontRef>
         </p:style>
       </p:cxnSp>
+      <p:pic>
+        <p:nvPicPr>
+          <p:cNvPr id="4" name="Picture 3">
+            <a:extLst>
+              <a:ext uri="{FF2B5EF4-FFF2-40B4-BE49-F238E27FC236}">
+                <a16:creationId xmlns:a16="http://schemas.microsoft.com/office/drawing/2014/main" id="{0339FB3F-3274-698B-10CD-7A7DDFD015E1}"/>
+              </a:ext>
+            </a:extLst>
+          </p:cNvPr>
+          <p:cNvPicPr>
+            <a:picLocks noChangeAspect="1"/>
+          </p:cNvPicPr>
+          <p:nvPr/>
+        </p:nvPicPr>
+        <p:blipFill>
+          <a:blip r:embed="rId5">
+            <a:extLst>
+              <a:ext uri="{28A0092B-C50C-407E-A947-70E740481C1C}">
+                <a14:useLocalDpi xmlns:a14="http://schemas.microsoft.com/office/drawing/2010/main" val="0"/>
+              </a:ext>
+            </a:extLst>
+          </a:blip>
+          <a:stretch>
+            <a:fillRect/>
+          </a:stretch>
+        </p:blipFill>
+        <p:spPr>
+          <a:xfrm>
+            <a:off x="6687675" y="1076215"/>
+            <a:ext cx="4391638" cy="4153480"/>
+          </a:xfrm>
+          <a:prstGeom prst="rect">
+            <a:avLst/>
+          </a:prstGeom>
+        </p:spPr>
+      </p:pic>
+      <p:cxnSp>
+        <p:nvCxnSpPr>
+          <p:cNvPr id="6" name="Straight Connector 5">
+            <a:extLst>
+              <a:ext uri="{FF2B5EF4-FFF2-40B4-BE49-F238E27FC236}">
+                <a16:creationId xmlns:a16="http://schemas.microsoft.com/office/drawing/2014/main" id="{99E8BD74-B732-F98C-DCE6-E201B31DD7CB}"/>
+              </a:ext>
+            </a:extLst>
+          </p:cNvPr>
+          <p:cNvCxnSpPr/>
+          <p:nvPr/>
+        </p:nvCxnSpPr>
+        <p:spPr>
+          <a:xfrm>
+            <a:off x="7496355" y="3862668"/>
+            <a:ext cx="1466490" cy="0"/>
+          </a:xfrm>
+          <a:prstGeom prst="line">
+            <a:avLst/>
+          </a:prstGeom>
+          <a:ln w="6350">
+            <a:prstDash val="sysDot"/>
+          </a:ln>
+        </p:spPr>
+        <p:style>
+          <a:lnRef idx="2">
+            <a:schemeClr val="accent1"/>
+          </a:lnRef>
+          <a:fillRef idx="0">
+            <a:schemeClr val="accent1"/>
+          </a:fillRef>
+          <a:effectRef idx="1">
+            <a:schemeClr val="accent1"/>
+          </a:effectRef>
+          <a:fontRef idx="minor">
+            <a:schemeClr val="tx1"/>
+          </a:fontRef>
+        </p:style>
+      </p:cxnSp>
+      <p:cxnSp>
+        <p:nvCxnSpPr>
+          <p:cNvPr id="15" name="Straight Arrow Connector 14">
+            <a:extLst>
+              <a:ext uri="{FF2B5EF4-FFF2-40B4-BE49-F238E27FC236}">
+                <a16:creationId xmlns:a16="http://schemas.microsoft.com/office/drawing/2014/main" id="{4540F94B-4F20-8F72-5F74-7971143BF542}"/>
+              </a:ext>
+            </a:extLst>
+          </p:cNvPr>
+          <p:cNvCxnSpPr/>
+          <p:nvPr/>
+        </p:nvCxnSpPr>
+        <p:spPr>
+          <a:xfrm flipV="1">
+            <a:off x="6687675" y="3655534"/>
+            <a:ext cx="252875" cy="103567"/>
+          </a:xfrm>
+          <a:prstGeom prst="straightConnector1">
+            <a:avLst/>
+          </a:prstGeom>
+          <a:ln>
+            <a:tailEnd type="triangle"/>
+          </a:ln>
+        </p:spPr>
+        <p:style>
+          <a:lnRef idx="2">
+            <a:schemeClr val="accent2"/>
+          </a:lnRef>
+          <a:fillRef idx="0">
+            <a:schemeClr val="accent2"/>
+          </a:fillRef>
+          <a:effectRef idx="1">
+            <a:schemeClr val="accent2"/>
+          </a:effectRef>
+          <a:fontRef idx="minor">
+            <a:schemeClr val="tx1"/>
+          </a:fontRef>
+        </p:style>
+      </p:cxnSp>
+      <p:cxnSp>
+        <p:nvCxnSpPr>
+          <p:cNvPr id="19" name="Straight Arrow Connector 18">
+            <a:extLst>
+              <a:ext uri="{FF2B5EF4-FFF2-40B4-BE49-F238E27FC236}">
+                <a16:creationId xmlns:a16="http://schemas.microsoft.com/office/drawing/2014/main" id="{9B7AEBCB-3151-61B0-29CC-81DF2581F0EE}"/>
+              </a:ext>
+            </a:extLst>
+          </p:cNvPr>
+          <p:cNvCxnSpPr>
+            <a:cxnSpLocks/>
+          </p:cNvCxnSpPr>
+          <p:nvPr/>
+        </p:nvCxnSpPr>
+        <p:spPr>
+          <a:xfrm flipH="1">
+            <a:off x="7118350" y="3423560"/>
+            <a:ext cx="273050" cy="145936"/>
+          </a:xfrm>
+          <a:prstGeom prst="straightConnector1">
+            <a:avLst/>
+          </a:prstGeom>
+          <a:ln>
+            <a:tailEnd type="triangle"/>
+          </a:ln>
+        </p:spPr>
+        <p:style>
+          <a:lnRef idx="2">
+            <a:schemeClr val="accent2"/>
+          </a:lnRef>
+          <a:fillRef idx="0">
+            <a:schemeClr val="accent2"/>
+          </a:fillRef>
+          <a:effectRef idx="1">
+            <a:schemeClr val="accent2"/>
+          </a:effectRef>
+          <a:fontRef idx="minor">
+            <a:schemeClr val="tx1"/>
+          </a:fontRef>
+        </p:style>
+      </p:cxnSp>
+      <mc:AlternateContent xmlns:mc="http://schemas.openxmlformats.org/markup-compatibility/2006" xmlns:a14="http://schemas.microsoft.com/office/drawing/2010/main">
+        <mc:Choice Requires="a14">
+          <p:sp>
+            <p:nvSpPr>
+              <p:cNvPr id="21" name="TextBox 20">
+                <a:extLst>
+                  <a:ext uri="{FF2B5EF4-FFF2-40B4-BE49-F238E27FC236}">
+                    <a16:creationId xmlns:a16="http://schemas.microsoft.com/office/drawing/2014/main" id="{BDEEEF72-8384-0F19-4EC5-1CC1F01A008E}"/>
+                  </a:ext>
+                </a:extLst>
+              </p:cNvPr>
+              <p:cNvSpPr txBox="1"/>
+              <p:nvPr/>
+            </p:nvSpPr>
+            <p:spPr>
+              <a:xfrm>
+                <a:off x="7008269" y="2813502"/>
+                <a:ext cx="493212" cy="618374"/>
+              </a:xfrm>
+              <a:prstGeom prst="rect">
+                <a:avLst/>
+              </a:prstGeom>
+              <a:noFill/>
+            </p:spPr>
+            <p:txBody>
+              <a:bodyPr wrap="none" rtlCol="0">
+                <a:spAutoFit/>
+              </a:bodyPr>
+              <a:lstStyle/>
+              <a:p>
+                <a:pPr/>
+                <a14:m>
+                  <m:oMathPara xmlns:m="http://schemas.openxmlformats.org/officeDocument/2006/math">
+                    <m:oMathParaPr>
+                      <m:jc m:val="centerGroup"/>
+                    </m:oMathParaPr>
+                    <m:oMath xmlns:m="http://schemas.openxmlformats.org/officeDocument/2006/math">
+                      <m:f>
+                        <m:fPr>
+                          <m:ctrlPr>
+                            <a:rPr lang="en-US" b="0" i="1" smtClean="0">
+                              <a:solidFill>
+                                <a:schemeClr val="accent2"/>
+                              </a:solidFill>
+                              <a:latin typeface="Cambria Math" panose="02040503050406030204" pitchFamily="18" charset="0"/>
+                            </a:rPr>
+                          </m:ctrlPr>
+                        </m:fPr>
+                        <m:num>
+                          <m:r>
+                            <m:rPr>
+                              <m:sty m:val="p"/>
+                            </m:rPr>
+                            <a:rPr lang="en-US" b="0" i="0" smtClean="0">
+                              <a:solidFill>
+                                <a:schemeClr val="accent2"/>
+                              </a:solidFill>
+                              <a:latin typeface="Cambria Math" panose="02040503050406030204" pitchFamily="18" charset="0"/>
+                            </a:rPr>
+                            <m:t>Δ</m:t>
+                          </m:r>
+                          <m:r>
+                            <a:rPr lang="en-US" b="0" i="1" smtClean="0">
+                              <a:solidFill>
+                                <a:schemeClr val="accent2"/>
+                              </a:solidFill>
+                              <a:latin typeface="Cambria Math" panose="02040503050406030204" pitchFamily="18" charset="0"/>
+                            </a:rPr>
+                            <m:t>𝜆</m:t>
+                          </m:r>
+                        </m:num>
+                        <m:den>
+                          <m:r>
+                            <a:rPr lang="en-US" b="0" i="1" smtClean="0">
+                              <a:solidFill>
+                                <a:schemeClr val="accent2"/>
+                              </a:solidFill>
+                              <a:latin typeface="Cambria Math" panose="02040503050406030204" pitchFamily="18" charset="0"/>
+                            </a:rPr>
+                            <m:t>𝜆</m:t>
+                          </m:r>
+                        </m:den>
+                      </m:f>
+                    </m:oMath>
+                  </m:oMathPara>
+                </a14:m>
+                <a:endParaRPr lang="en-US" dirty="0">
+                  <a:solidFill>
+                    <a:schemeClr val="accent2"/>
+                  </a:solidFill>
+                </a:endParaRPr>
+              </a:p>
+            </p:txBody>
+          </p:sp>
+        </mc:Choice>
+        <mc:Fallback xmlns="">
+          <p:sp>
+            <p:nvSpPr>
+              <p:cNvPr id="21" name="TextBox 20">
+                <a:extLst>
+                  <a:ext uri="{FF2B5EF4-FFF2-40B4-BE49-F238E27FC236}">
+                    <a16:creationId xmlns:a16="http://schemas.microsoft.com/office/drawing/2014/main" id="{BDEEEF72-8384-0F19-4EC5-1CC1F01A008E}"/>
+                  </a:ext>
+                </a:extLst>
+              </p:cNvPr>
+              <p:cNvSpPr txBox="1">
+                <a:spLocks noRot="1" noChangeAspect="1" noMove="1" noResize="1" noEditPoints="1" noAdjustHandles="1" noChangeArrowheads="1" noChangeShapeType="1" noTextEdit="1"/>
+              </p:cNvSpPr>
+              <p:nvPr/>
+            </p:nvSpPr>
+            <p:spPr>
+              <a:xfrm>
+                <a:off x="7008269" y="2813502"/>
+                <a:ext cx="493212" cy="618374"/>
+              </a:xfrm>
+              <a:prstGeom prst="rect">
+                <a:avLst/>
+              </a:prstGeom>
+              <a:blipFill>
+                <a:blip r:embed="rId6"/>
+                <a:stretch>
+                  <a:fillRect/>
+                </a:stretch>
+              </a:blipFill>
+            </p:spPr>
+            <p:txBody>
+              <a:bodyPr/>
+              <a:lstStyle/>
+              <a:p>
+                <a:r>
+                  <a:rPr lang="en-US">
+                    <a:noFill/>
+                  </a:rPr>
+                  <a:t> </a:t>
+                </a:r>
+              </a:p>
+            </p:txBody>
+          </p:sp>
+        </mc:Fallback>
+      </mc:AlternateContent>
+      <p:sp>
+        <p:nvSpPr>
+          <p:cNvPr id="22" name="TextBox 21">
+            <a:extLst>
+              <a:ext uri="{FF2B5EF4-FFF2-40B4-BE49-F238E27FC236}">
+                <a16:creationId xmlns:a16="http://schemas.microsoft.com/office/drawing/2014/main" id="{119F4701-C2DA-3DED-FE99-0A20920E0D26}"/>
+              </a:ext>
+            </a:extLst>
+          </p:cNvPr>
+          <p:cNvSpPr txBox="1"/>
+          <p:nvPr/>
+        </p:nvSpPr>
+        <p:spPr>
+          <a:xfrm>
+            <a:off x="7764630" y="1714500"/>
+            <a:ext cx="2237728" cy="584775"/>
+          </a:xfrm>
+          <a:prstGeom prst="rect">
+            <a:avLst/>
+          </a:prstGeom>
+          <a:noFill/>
+        </p:spPr>
+        <p:txBody>
+          <a:bodyPr wrap="none" rtlCol="0">
+            <a:spAutoFit/>
+          </a:bodyPr>
+          <a:lstStyle/>
+          <a:p>
+            <a:r>
+              <a:rPr lang="en-US" sz="3200" dirty="0">
+                <a:solidFill>
+                  <a:schemeClr val="bg1"/>
+                </a:solidFill>
+              </a:rPr>
+              <a:t>Ewald Shell</a:t>
+            </a:r>
+          </a:p>
+        </p:txBody>
+      </p:sp>
+      <p:sp>
+        <p:nvSpPr>
+          <p:cNvPr id="23" name="TextBox 22">
+            <a:extLst>
+              <a:ext uri="{FF2B5EF4-FFF2-40B4-BE49-F238E27FC236}">
+                <a16:creationId xmlns:a16="http://schemas.microsoft.com/office/drawing/2014/main" id="{98391F30-547F-6A10-AAE6-EFF435098E15}"/>
+              </a:ext>
+            </a:extLst>
+          </p:cNvPr>
+          <p:cNvSpPr txBox="1"/>
+          <p:nvPr/>
+        </p:nvSpPr>
+        <p:spPr>
+          <a:xfrm>
+            <a:off x="6634243" y="4243067"/>
+            <a:ext cx="968214" cy="707886"/>
+          </a:xfrm>
+          <a:prstGeom prst="rect">
+            <a:avLst/>
+          </a:prstGeom>
+          <a:noFill/>
+        </p:spPr>
+        <p:txBody>
+          <a:bodyPr wrap="none" rtlCol="0">
+            <a:spAutoFit/>
+          </a:bodyPr>
+          <a:lstStyle/>
+          <a:p>
+            <a:r>
+              <a:rPr lang="en-US" sz="2000" dirty="0"/>
+              <a:t>Bragg </a:t>
+            </a:r>
+          </a:p>
+          <a:p>
+            <a:r>
+              <a:rPr lang="en-US" sz="2000" dirty="0"/>
+              <a:t>Sphere</a:t>
+            </a:r>
+          </a:p>
+        </p:txBody>
+      </p:sp>
     </p:spTree>
     <p:extLst>
       <p:ext uri="{BB962C8B-B14F-4D97-AF65-F5344CB8AC3E}">
@@ -3997,6 +4666,621 @@
           <a:chExt cx="0" cy="0"/>
         </a:xfrm>
       </p:grpSpPr>
+      <p:pic>
+        <p:nvPicPr>
+          <p:cNvPr id="3" name="Picture 2">
+            <a:extLst>
+              <a:ext uri="{FF2B5EF4-FFF2-40B4-BE49-F238E27FC236}">
+                <a16:creationId xmlns:a16="http://schemas.microsoft.com/office/drawing/2014/main" id="{FA3E60ED-0DA0-7132-6A0A-03970DE9FFD5}"/>
+              </a:ext>
+            </a:extLst>
+          </p:cNvPr>
+          <p:cNvPicPr>
+            <a:picLocks noChangeAspect="1"/>
+          </p:cNvPicPr>
+          <p:nvPr/>
+        </p:nvPicPr>
+        <p:blipFill>
+          <a:blip r:embed="rId2">
+            <a:extLst>
+              <a:ext uri="{28A0092B-C50C-407E-A947-70E740481C1C}">
+                <a14:useLocalDpi xmlns:a14="http://schemas.microsoft.com/office/drawing/2010/main" val="0"/>
+              </a:ext>
+            </a:extLst>
+          </a:blip>
+          <a:stretch>
+            <a:fillRect/>
+          </a:stretch>
+        </p:blipFill>
+        <p:spPr>
+          <a:xfrm>
+            <a:off x="2667000" y="0"/>
+            <a:ext cx="6858000" cy="6858000"/>
+          </a:xfrm>
+          <a:prstGeom prst="rect">
+            <a:avLst/>
+          </a:prstGeom>
+        </p:spPr>
+      </p:pic>
+      <p:cxnSp>
+        <p:nvCxnSpPr>
+          <p:cNvPr id="5" name="Straight Connector 4">
+            <a:extLst>
+              <a:ext uri="{FF2B5EF4-FFF2-40B4-BE49-F238E27FC236}">
+                <a16:creationId xmlns:a16="http://schemas.microsoft.com/office/drawing/2014/main" id="{123316F3-25BB-254A-094B-0248AEDA554A}"/>
+              </a:ext>
+            </a:extLst>
+          </p:cNvPr>
+          <p:cNvCxnSpPr/>
+          <p:nvPr/>
+        </p:nvCxnSpPr>
+        <p:spPr>
+          <a:xfrm flipV="1">
+            <a:off x="8171234" y="4649821"/>
+            <a:ext cx="0" cy="350196"/>
+          </a:xfrm>
+          <a:prstGeom prst="line">
+            <a:avLst/>
+          </a:prstGeom>
+          <a:ln>
+            <a:prstDash val="sysDot"/>
+          </a:ln>
+        </p:spPr>
+        <p:style>
+          <a:lnRef idx="2">
+            <a:schemeClr val="dk1"/>
+          </a:lnRef>
+          <a:fillRef idx="0">
+            <a:schemeClr val="dk1"/>
+          </a:fillRef>
+          <a:effectRef idx="1">
+            <a:schemeClr val="dk1"/>
+          </a:effectRef>
+          <a:fontRef idx="minor">
+            <a:schemeClr val="tx1"/>
+          </a:fontRef>
+        </p:style>
+      </p:cxnSp>
+      <p:cxnSp>
+        <p:nvCxnSpPr>
+          <p:cNvPr id="6" name="Straight Connector 5">
+            <a:extLst>
+              <a:ext uri="{FF2B5EF4-FFF2-40B4-BE49-F238E27FC236}">
+                <a16:creationId xmlns:a16="http://schemas.microsoft.com/office/drawing/2014/main" id="{4F40CFE6-98EA-1925-7900-CCAA0C1B93B2}"/>
+              </a:ext>
+            </a:extLst>
+          </p:cNvPr>
+          <p:cNvCxnSpPr/>
+          <p:nvPr/>
+        </p:nvCxnSpPr>
+        <p:spPr>
+          <a:xfrm flipV="1">
+            <a:off x="6287800" y="3007926"/>
+            <a:ext cx="0" cy="350196"/>
+          </a:xfrm>
+          <a:prstGeom prst="line">
+            <a:avLst/>
+          </a:prstGeom>
+          <a:ln>
+            <a:prstDash val="sysDot"/>
+          </a:ln>
+        </p:spPr>
+        <p:style>
+          <a:lnRef idx="2">
+            <a:schemeClr val="dk1"/>
+          </a:lnRef>
+          <a:fillRef idx="0">
+            <a:schemeClr val="dk1"/>
+          </a:fillRef>
+          <a:effectRef idx="1">
+            <a:schemeClr val="dk1"/>
+          </a:effectRef>
+          <a:fontRef idx="minor">
+            <a:schemeClr val="tx1"/>
+          </a:fontRef>
+        </p:style>
+      </p:cxnSp>
+      <p:cxnSp>
+        <p:nvCxnSpPr>
+          <p:cNvPr id="7" name="Straight Connector 6">
+            <a:extLst>
+              <a:ext uri="{FF2B5EF4-FFF2-40B4-BE49-F238E27FC236}">
+                <a16:creationId xmlns:a16="http://schemas.microsoft.com/office/drawing/2014/main" id="{856EFE5B-777A-4D52-29DC-A969C917C479}"/>
+              </a:ext>
+            </a:extLst>
+          </p:cNvPr>
+          <p:cNvCxnSpPr/>
+          <p:nvPr/>
+        </p:nvCxnSpPr>
+        <p:spPr>
+          <a:xfrm flipV="1">
+            <a:off x="4412992" y="1426416"/>
+            <a:ext cx="0" cy="350196"/>
+          </a:xfrm>
+          <a:prstGeom prst="line">
+            <a:avLst/>
+          </a:prstGeom>
+          <a:ln>
+            <a:prstDash val="sysDot"/>
+          </a:ln>
+        </p:spPr>
+        <p:style>
+          <a:lnRef idx="2">
+            <a:schemeClr val="dk1"/>
+          </a:lnRef>
+          <a:fillRef idx="0">
+            <a:schemeClr val="dk1"/>
+          </a:fillRef>
+          <a:effectRef idx="1">
+            <a:schemeClr val="dk1"/>
+          </a:effectRef>
+          <a:fontRef idx="minor">
+            <a:schemeClr val="tx1"/>
+          </a:fontRef>
+        </p:style>
+      </p:cxnSp>
+      <p:cxnSp>
+        <p:nvCxnSpPr>
+          <p:cNvPr id="8" name="Straight Connector 7">
+            <a:extLst>
+              <a:ext uri="{FF2B5EF4-FFF2-40B4-BE49-F238E27FC236}">
+                <a16:creationId xmlns:a16="http://schemas.microsoft.com/office/drawing/2014/main" id="{82D65512-12D5-343F-6715-9B5CF849DA76}"/>
+              </a:ext>
+            </a:extLst>
+          </p:cNvPr>
+          <p:cNvCxnSpPr>
+            <a:cxnSpLocks/>
+          </p:cNvCxnSpPr>
+          <p:nvPr/>
+        </p:nvCxnSpPr>
+        <p:spPr>
+          <a:xfrm flipV="1">
+            <a:off x="6345878" y="4649821"/>
+            <a:ext cx="108699" cy="424529"/>
+          </a:xfrm>
+          <a:prstGeom prst="line">
+            <a:avLst/>
+          </a:prstGeom>
+        </p:spPr>
+        <p:style>
+          <a:lnRef idx="2">
+            <a:schemeClr val="dk1"/>
+          </a:lnRef>
+          <a:fillRef idx="0">
+            <a:schemeClr val="dk1"/>
+          </a:fillRef>
+          <a:effectRef idx="1">
+            <a:schemeClr val="dk1"/>
+          </a:effectRef>
+          <a:fontRef idx="minor">
+            <a:schemeClr val="tx1"/>
+          </a:fontRef>
+        </p:style>
+      </p:cxnSp>
+      <p:cxnSp>
+        <p:nvCxnSpPr>
+          <p:cNvPr id="10" name="Straight Connector 9">
+            <a:extLst>
+              <a:ext uri="{FF2B5EF4-FFF2-40B4-BE49-F238E27FC236}">
+                <a16:creationId xmlns:a16="http://schemas.microsoft.com/office/drawing/2014/main" id="{184D6841-3F37-2B8A-C3DB-873E2C4199E4}"/>
+              </a:ext>
+            </a:extLst>
+          </p:cNvPr>
+          <p:cNvCxnSpPr>
+            <a:cxnSpLocks/>
+          </p:cNvCxnSpPr>
+          <p:nvPr/>
+        </p:nvCxnSpPr>
+        <p:spPr>
+          <a:xfrm flipV="1">
+            <a:off x="4443903" y="3007926"/>
+            <a:ext cx="68001" cy="443650"/>
+          </a:xfrm>
+          <a:prstGeom prst="line">
+            <a:avLst/>
+          </a:prstGeom>
+        </p:spPr>
+        <p:style>
+          <a:lnRef idx="2">
+            <a:schemeClr val="dk1"/>
+          </a:lnRef>
+          <a:fillRef idx="0">
+            <a:schemeClr val="dk1"/>
+          </a:fillRef>
+          <a:effectRef idx="1">
+            <a:schemeClr val="dk1"/>
+          </a:effectRef>
+          <a:fontRef idx="minor">
+            <a:schemeClr val="tx1"/>
+          </a:fontRef>
+        </p:style>
+      </p:cxnSp>
+      <p:cxnSp>
+        <p:nvCxnSpPr>
+          <p:cNvPr id="11" name="Straight Connector 10">
+            <a:extLst>
+              <a:ext uri="{FF2B5EF4-FFF2-40B4-BE49-F238E27FC236}">
+                <a16:creationId xmlns:a16="http://schemas.microsoft.com/office/drawing/2014/main" id="{46B167F0-DEBC-CA65-9130-27538F452A9D}"/>
+              </a:ext>
+            </a:extLst>
+          </p:cNvPr>
+          <p:cNvCxnSpPr>
+            <a:cxnSpLocks/>
+          </p:cNvCxnSpPr>
+          <p:nvPr/>
+        </p:nvCxnSpPr>
+        <p:spPr>
+          <a:xfrm flipV="1">
+            <a:off x="6287800" y="1360388"/>
+            <a:ext cx="0" cy="447747"/>
+          </a:xfrm>
+          <a:prstGeom prst="line">
+            <a:avLst/>
+          </a:prstGeom>
+        </p:spPr>
+        <p:style>
+          <a:lnRef idx="2">
+            <a:schemeClr val="dk1"/>
+          </a:lnRef>
+          <a:fillRef idx="0">
+            <a:schemeClr val="dk1"/>
+          </a:fillRef>
+          <a:effectRef idx="1">
+            <a:schemeClr val="dk1"/>
+          </a:effectRef>
+          <a:fontRef idx="minor">
+            <a:schemeClr val="tx1"/>
+          </a:fontRef>
+        </p:style>
+      </p:cxnSp>
+      <p:cxnSp>
+        <p:nvCxnSpPr>
+          <p:cNvPr id="13" name="Straight Connector 12">
+            <a:extLst>
+              <a:ext uri="{FF2B5EF4-FFF2-40B4-BE49-F238E27FC236}">
+                <a16:creationId xmlns:a16="http://schemas.microsoft.com/office/drawing/2014/main" id="{872899B0-D4C3-B788-274A-0D6D6FF92E8C}"/>
+              </a:ext>
+            </a:extLst>
+          </p:cNvPr>
+          <p:cNvCxnSpPr>
+            <a:cxnSpLocks/>
+          </p:cNvCxnSpPr>
+          <p:nvPr/>
+        </p:nvCxnSpPr>
+        <p:spPr>
+          <a:xfrm flipH="1" flipV="1">
+            <a:off x="8085551" y="1472192"/>
+            <a:ext cx="24168" cy="350271"/>
+          </a:xfrm>
+          <a:prstGeom prst="line">
+            <a:avLst/>
+          </a:prstGeom>
+        </p:spPr>
+        <p:style>
+          <a:lnRef idx="2">
+            <a:schemeClr val="dk1"/>
+          </a:lnRef>
+          <a:fillRef idx="0">
+            <a:schemeClr val="dk1"/>
+          </a:fillRef>
+          <a:effectRef idx="1">
+            <a:schemeClr val="dk1"/>
+          </a:effectRef>
+          <a:fontRef idx="minor">
+            <a:schemeClr val="tx1"/>
+          </a:fontRef>
+        </p:style>
+      </p:cxnSp>
+      <p:cxnSp>
+        <p:nvCxnSpPr>
+          <p:cNvPr id="15" name="Straight Connector 14">
+            <a:extLst>
+              <a:ext uri="{FF2B5EF4-FFF2-40B4-BE49-F238E27FC236}">
+                <a16:creationId xmlns:a16="http://schemas.microsoft.com/office/drawing/2014/main" id="{C91BCE6C-A3C6-848C-A969-AE32BE330A39}"/>
+              </a:ext>
+            </a:extLst>
+          </p:cNvPr>
+          <p:cNvCxnSpPr>
+            <a:cxnSpLocks/>
+          </p:cNvCxnSpPr>
+          <p:nvPr/>
+        </p:nvCxnSpPr>
+        <p:spPr>
+          <a:xfrm flipV="1">
+            <a:off x="4520530" y="4589253"/>
+            <a:ext cx="318889" cy="485097"/>
+          </a:xfrm>
+          <a:prstGeom prst="line">
+            <a:avLst/>
+          </a:prstGeom>
+        </p:spPr>
+        <p:style>
+          <a:lnRef idx="2">
+            <a:schemeClr val="dk1"/>
+          </a:lnRef>
+          <a:fillRef idx="0">
+            <a:schemeClr val="dk1"/>
+          </a:fillRef>
+          <a:effectRef idx="1">
+            <a:schemeClr val="dk1"/>
+          </a:effectRef>
+          <a:fontRef idx="minor">
+            <a:schemeClr val="tx1"/>
+          </a:fontRef>
+        </p:style>
+      </p:cxnSp>
+      <p:cxnSp>
+        <p:nvCxnSpPr>
+          <p:cNvPr id="17" name="Straight Connector 16">
+            <a:extLst>
+              <a:ext uri="{FF2B5EF4-FFF2-40B4-BE49-F238E27FC236}">
+                <a16:creationId xmlns:a16="http://schemas.microsoft.com/office/drawing/2014/main" id="{ACC85DB0-F8D0-896F-4785-2843E00F102B}"/>
+              </a:ext>
+            </a:extLst>
+          </p:cNvPr>
+          <p:cNvCxnSpPr>
+            <a:cxnSpLocks/>
+          </p:cNvCxnSpPr>
+          <p:nvPr/>
+        </p:nvCxnSpPr>
+        <p:spPr>
+          <a:xfrm flipH="1" flipV="1">
+            <a:off x="8126083" y="2924355"/>
+            <a:ext cx="27899" cy="455636"/>
+          </a:xfrm>
+          <a:prstGeom prst="line">
+            <a:avLst/>
+          </a:prstGeom>
+        </p:spPr>
+        <p:style>
+          <a:lnRef idx="2">
+            <a:schemeClr val="dk1"/>
+          </a:lnRef>
+          <a:fillRef idx="0">
+            <a:schemeClr val="dk1"/>
+          </a:fillRef>
+          <a:effectRef idx="1">
+            <a:schemeClr val="dk1"/>
+          </a:effectRef>
+          <a:fontRef idx="minor">
+            <a:schemeClr val="tx1"/>
+          </a:fontRef>
+        </p:style>
+      </p:cxnSp>
+      <p:cxnSp>
+        <p:nvCxnSpPr>
+          <p:cNvPr id="20" name="Straight Connector 19">
+            <a:extLst>
+              <a:ext uri="{FF2B5EF4-FFF2-40B4-BE49-F238E27FC236}">
+                <a16:creationId xmlns:a16="http://schemas.microsoft.com/office/drawing/2014/main" id="{E023FB43-DF49-4607-A9E1-809EF8F5A87E}"/>
+              </a:ext>
+            </a:extLst>
+          </p:cNvPr>
+          <p:cNvCxnSpPr/>
+          <p:nvPr/>
+        </p:nvCxnSpPr>
+        <p:spPr>
+          <a:xfrm flipV="1">
+            <a:off x="4404366" y="3059682"/>
+            <a:ext cx="0" cy="350196"/>
+          </a:xfrm>
+          <a:prstGeom prst="line">
+            <a:avLst/>
+          </a:prstGeom>
+          <a:ln>
+            <a:prstDash val="sysDot"/>
+          </a:ln>
+        </p:spPr>
+        <p:style>
+          <a:lnRef idx="2">
+            <a:schemeClr val="dk1"/>
+          </a:lnRef>
+          <a:fillRef idx="0">
+            <a:schemeClr val="dk1"/>
+          </a:fillRef>
+          <a:effectRef idx="1">
+            <a:schemeClr val="dk1"/>
+          </a:effectRef>
+          <a:fontRef idx="minor">
+            <a:schemeClr val="tx1"/>
+          </a:fontRef>
+        </p:style>
+      </p:cxnSp>
+      <p:cxnSp>
+        <p:nvCxnSpPr>
+          <p:cNvPr id="21" name="Straight Connector 20">
+            <a:extLst>
+              <a:ext uri="{FF2B5EF4-FFF2-40B4-BE49-F238E27FC236}">
+                <a16:creationId xmlns:a16="http://schemas.microsoft.com/office/drawing/2014/main" id="{0CFFC1C2-F07F-FE0E-A07E-0C67D111BDEE}"/>
+              </a:ext>
+            </a:extLst>
+          </p:cNvPr>
+          <p:cNvCxnSpPr/>
+          <p:nvPr/>
+        </p:nvCxnSpPr>
+        <p:spPr>
+          <a:xfrm flipV="1">
+            <a:off x="4412992" y="4665329"/>
+            <a:ext cx="0" cy="350196"/>
+          </a:xfrm>
+          <a:prstGeom prst="line">
+            <a:avLst/>
+          </a:prstGeom>
+          <a:ln>
+            <a:prstDash val="sysDot"/>
+          </a:ln>
+        </p:spPr>
+        <p:style>
+          <a:lnRef idx="2">
+            <a:schemeClr val="dk1"/>
+          </a:lnRef>
+          <a:fillRef idx="0">
+            <a:schemeClr val="dk1"/>
+          </a:fillRef>
+          <a:effectRef idx="1">
+            <a:schemeClr val="dk1"/>
+          </a:effectRef>
+          <a:fontRef idx="minor">
+            <a:schemeClr val="tx1"/>
+          </a:fontRef>
+        </p:style>
+      </p:cxnSp>
+      <p:cxnSp>
+        <p:nvCxnSpPr>
+          <p:cNvPr id="22" name="Straight Connector 21">
+            <a:extLst>
+              <a:ext uri="{FF2B5EF4-FFF2-40B4-BE49-F238E27FC236}">
+                <a16:creationId xmlns:a16="http://schemas.microsoft.com/office/drawing/2014/main" id="{A24B4914-E2F2-A401-D9EE-27A3036B8CC8}"/>
+              </a:ext>
+            </a:extLst>
+          </p:cNvPr>
+          <p:cNvCxnSpPr/>
+          <p:nvPr/>
+        </p:nvCxnSpPr>
+        <p:spPr>
+          <a:xfrm flipV="1">
+            <a:off x="6307071" y="4667073"/>
+            <a:ext cx="0" cy="350196"/>
+          </a:xfrm>
+          <a:prstGeom prst="line">
+            <a:avLst/>
+          </a:prstGeom>
+          <a:ln>
+            <a:prstDash val="sysDot"/>
+          </a:ln>
+        </p:spPr>
+        <p:style>
+          <a:lnRef idx="2">
+            <a:schemeClr val="dk1"/>
+          </a:lnRef>
+          <a:fillRef idx="0">
+            <a:schemeClr val="dk1"/>
+          </a:fillRef>
+          <a:effectRef idx="1">
+            <a:schemeClr val="dk1"/>
+          </a:effectRef>
+          <a:fontRef idx="minor">
+            <a:schemeClr val="tx1"/>
+          </a:fontRef>
+        </p:style>
+      </p:cxnSp>
+      <p:cxnSp>
+        <p:nvCxnSpPr>
+          <p:cNvPr id="23" name="Straight Connector 22">
+            <a:extLst>
+              <a:ext uri="{FF2B5EF4-FFF2-40B4-BE49-F238E27FC236}">
+                <a16:creationId xmlns:a16="http://schemas.microsoft.com/office/drawing/2014/main" id="{5A5C705B-CEF2-1E00-787D-F5A7DB080AE6}"/>
+              </a:ext>
+            </a:extLst>
+          </p:cNvPr>
+          <p:cNvCxnSpPr/>
+          <p:nvPr/>
+        </p:nvCxnSpPr>
+        <p:spPr>
+          <a:xfrm flipV="1">
+            <a:off x="8176130" y="1466565"/>
+            <a:ext cx="0" cy="350196"/>
+          </a:xfrm>
+          <a:prstGeom prst="line">
+            <a:avLst/>
+          </a:prstGeom>
+          <a:ln>
+            <a:prstDash val="sysDot"/>
+          </a:ln>
+        </p:spPr>
+        <p:style>
+          <a:lnRef idx="2">
+            <a:schemeClr val="dk1"/>
+          </a:lnRef>
+          <a:fillRef idx="0">
+            <a:schemeClr val="dk1"/>
+          </a:fillRef>
+          <a:effectRef idx="1">
+            <a:schemeClr val="dk1"/>
+          </a:effectRef>
+          <a:fontRef idx="minor">
+            <a:schemeClr val="tx1"/>
+          </a:fontRef>
+        </p:style>
+      </p:cxnSp>
+      <p:cxnSp>
+        <p:nvCxnSpPr>
+          <p:cNvPr id="24" name="Straight Connector 23">
+            <a:extLst>
+              <a:ext uri="{FF2B5EF4-FFF2-40B4-BE49-F238E27FC236}">
+                <a16:creationId xmlns:a16="http://schemas.microsoft.com/office/drawing/2014/main" id="{BBBD510A-E1B2-27D5-FADE-AFE6E07526BE}"/>
+              </a:ext>
+            </a:extLst>
+          </p:cNvPr>
+          <p:cNvCxnSpPr/>
+          <p:nvPr/>
+        </p:nvCxnSpPr>
+        <p:spPr>
+          <a:xfrm flipV="1">
+            <a:off x="6303343" y="1432061"/>
+            <a:ext cx="0" cy="350196"/>
+          </a:xfrm>
+          <a:prstGeom prst="line">
+            <a:avLst/>
+          </a:prstGeom>
+          <a:ln>
+            <a:prstDash val="sysDot"/>
+          </a:ln>
+        </p:spPr>
+        <p:style>
+          <a:lnRef idx="2">
+            <a:schemeClr val="dk1"/>
+          </a:lnRef>
+          <a:fillRef idx="0">
+            <a:schemeClr val="dk1"/>
+          </a:fillRef>
+          <a:effectRef idx="1">
+            <a:schemeClr val="dk1"/>
+          </a:effectRef>
+          <a:fontRef idx="minor">
+            <a:schemeClr val="tx1"/>
+          </a:fontRef>
+        </p:style>
+      </p:cxnSp>
+      <p:cxnSp>
+        <p:nvCxnSpPr>
+          <p:cNvPr id="26" name="Straight Connector 25">
+            <a:extLst>
+              <a:ext uri="{FF2B5EF4-FFF2-40B4-BE49-F238E27FC236}">
+                <a16:creationId xmlns:a16="http://schemas.microsoft.com/office/drawing/2014/main" id="{80E18C60-09C0-6779-3E47-3DCAB8275251}"/>
+              </a:ext>
+            </a:extLst>
+          </p:cNvPr>
+          <p:cNvCxnSpPr/>
+          <p:nvPr/>
+        </p:nvCxnSpPr>
+        <p:spPr>
+          <a:xfrm flipV="1">
+            <a:off x="8173252" y="3059682"/>
+            <a:ext cx="0" cy="350196"/>
+          </a:xfrm>
+          <a:prstGeom prst="line">
+            <a:avLst/>
+          </a:prstGeom>
+          <a:ln>
+            <a:prstDash val="sysDot"/>
+          </a:ln>
+        </p:spPr>
+        <p:style>
+          <a:lnRef idx="2">
+            <a:schemeClr val="dk1"/>
+          </a:lnRef>
+          <a:fillRef idx="0">
+            <a:schemeClr val="dk1"/>
+          </a:fillRef>
+          <a:effectRef idx="1">
+            <a:schemeClr val="dk1"/>
+          </a:effectRef>
+          <a:fontRef idx="minor">
+            <a:schemeClr val="tx1"/>
+          </a:fontRef>
+        </p:style>
+      </p:cxnSp>
     </p:spTree>
     <p:extLst>
       <p:ext uri="{BB962C8B-B14F-4D97-AF65-F5344CB8AC3E}">

--- a/figures/mosaic/Presentation1.pptx
+++ b/figures/mosaic/Presentation1.pptx
@@ -116,7 +116,7 @@
 <file path=ppt/revisionInfo.xml><?xml version="1.0" encoding="utf-8"?>
 <p1510:revInfo xmlns:a="http://schemas.openxmlformats.org/drawingml/2006/main" xmlns:r="http://schemas.openxmlformats.org/officeDocument/2006/relationships" xmlns:p1510="http://schemas.microsoft.com/office/powerpoint/2015/10/main">
   <p1510:revLst>
-    <p1510:client id="{4EA3F769-6A7E-4D75-9FB8-D0A0F467EE0F}" v="107" dt="2026-05-22T17:09:07.515"/>
+    <p1510:client id="{4EA3F769-6A7E-4D75-9FB8-D0A0F467EE0F}" v="158" dt="2026-05-22T22:50:02.241"/>
   </p1510:revLst>
 </p1510:revInfo>
 </file>
@@ -125,8 +125,8 @@
 <pc:chgInfo xmlns:a="http://schemas.openxmlformats.org/drawingml/2006/main" xmlns:r="http://schemas.openxmlformats.org/officeDocument/2006/relationships" xmlns:ac="http://schemas.microsoft.com/office/drawing/2013/main/command" xmlns:pc="http://schemas.microsoft.com/office/powerpoint/2013/main/command">
   <pc:docChgLst>
     <pc:chgData name="David Beckwitt" userId="bdca50846bee3b35" providerId="LiveId" clId="{77C57F99-3B40-463A-9855-34DA2A8048A2}"/>
-    <pc:docChg chg="custSel addSld delSld modSld">
-      <pc:chgData name="David Beckwitt" userId="bdca50846bee3b35" providerId="LiveId" clId="{77C57F99-3B40-463A-9855-34DA2A8048A2}" dt="2026-05-22T17:09:51.557" v="316" actId="1037"/>
+    <pc:docChg chg="undo custSel addSld delSld modSld">
+      <pc:chgData name="David Beckwitt" userId="bdca50846bee3b35" providerId="LiveId" clId="{77C57F99-3B40-463A-9855-34DA2A8048A2}" dt="2026-05-22T22:50:02.241" v="446" actId="20577"/>
       <pc:docMkLst>
         <pc:docMk/>
       </pc:docMkLst>
@@ -282,7 +282,7 @@
         </pc:cxnChg>
       </pc:sldChg>
       <pc:sldChg chg="addSp delSp modSp new mod">
-        <pc:chgData name="David Beckwitt" userId="bdca50846bee3b35" providerId="LiveId" clId="{77C57F99-3B40-463A-9855-34DA2A8048A2}" dt="2026-05-22T17:09:51.557" v="316" actId="1037"/>
+        <pc:chgData name="David Beckwitt" userId="bdca50846bee3b35" providerId="LiveId" clId="{77C57F99-3B40-463A-9855-34DA2A8048A2}" dt="2026-05-22T22:50:02.241" v="446" actId="20577"/>
         <pc:sldMkLst>
           <pc:docMk/>
           <pc:sldMk cId="1480126713" sldId="257"/>
@@ -303,12 +303,108 @@
             <ac:spMk id="3" creationId="{7EC09764-BDA1-84B6-EBF8-D6B1A930C8E7}"/>
           </ac:spMkLst>
         </pc:spChg>
-        <pc:picChg chg="add mod">
-          <ac:chgData name="David Beckwitt" userId="bdca50846bee3b35" providerId="LiveId" clId="{77C57F99-3B40-463A-9855-34DA2A8048A2}" dt="2026-05-22T17:06:28.986" v="191"/>
+        <pc:spChg chg="add del mod">
+          <ac:chgData name="David Beckwitt" userId="bdca50846bee3b35" providerId="LiveId" clId="{77C57F99-3B40-463A-9855-34DA2A8048A2}" dt="2026-05-22T22:49:23.686" v="409" actId="478"/>
+          <ac:spMkLst>
+            <pc:docMk/>
+            <pc:sldMk cId="1480126713" sldId="257"/>
+            <ac:spMk id="14" creationId="{CCB66581-C166-D088-0546-37F7F022E1CD}"/>
+          </ac:spMkLst>
+        </pc:spChg>
+        <pc:spChg chg="add del">
+          <ac:chgData name="David Beckwitt" userId="bdca50846bee3b35" providerId="LiveId" clId="{77C57F99-3B40-463A-9855-34DA2A8048A2}" dt="2026-05-22T22:47:43.188" v="339" actId="22"/>
+          <ac:spMkLst>
+            <pc:docMk/>
+            <pc:sldMk cId="1480126713" sldId="257"/>
+            <ac:spMk id="18" creationId="{6B389BF2-F5BD-076B-17C3-F03487D36057}"/>
+          </ac:spMkLst>
+        </pc:spChg>
+        <pc:spChg chg="add del mod">
+          <ac:chgData name="David Beckwitt" userId="bdca50846bee3b35" providerId="LiveId" clId="{77C57F99-3B40-463A-9855-34DA2A8048A2}" dt="2026-05-22T22:49:22.484" v="408" actId="478"/>
+          <ac:spMkLst>
+            <pc:docMk/>
+            <pc:sldMk cId="1480126713" sldId="257"/>
+            <ac:spMk id="19" creationId="{E088FB6F-5242-186B-BCFA-E83FFFA2365B}"/>
+          </ac:spMkLst>
+        </pc:spChg>
+        <pc:spChg chg="add mod">
+          <ac:chgData name="David Beckwitt" userId="bdca50846bee3b35" providerId="LiveId" clId="{77C57F99-3B40-463A-9855-34DA2A8048A2}" dt="2026-05-22T22:48:12.578" v="355" actId="1076"/>
+          <ac:spMkLst>
+            <pc:docMk/>
+            <pc:sldMk cId="1480126713" sldId="257"/>
+            <ac:spMk id="25" creationId="{221D1D13-E96D-C72D-DEE8-E99DC82C8CE8}"/>
+          </ac:spMkLst>
+        </pc:spChg>
+        <pc:spChg chg="add del mod">
+          <ac:chgData name="David Beckwitt" userId="bdca50846bee3b35" providerId="LiveId" clId="{77C57F99-3B40-463A-9855-34DA2A8048A2}" dt="2026-05-22T22:49:14.538" v="402" actId="478"/>
+          <ac:spMkLst>
+            <pc:docMk/>
+            <pc:sldMk cId="1480126713" sldId="257"/>
+            <ac:spMk id="27" creationId="{3C886DC9-66B5-7C61-E5F9-57992792D4D7}"/>
+          </ac:spMkLst>
+        </pc:spChg>
+        <pc:spChg chg="add mod">
+          <ac:chgData name="David Beckwitt" userId="bdca50846bee3b35" providerId="LiveId" clId="{77C57F99-3B40-463A-9855-34DA2A8048A2}" dt="2026-05-22T22:49:12.421" v="401" actId="1076"/>
+          <ac:spMkLst>
+            <pc:docMk/>
+            <pc:sldMk cId="1480126713" sldId="257"/>
+            <ac:spMk id="28" creationId="{88C912C9-CE2C-67FF-5F8B-27CF6908D9FC}"/>
+          </ac:spMkLst>
+        </pc:spChg>
+        <pc:spChg chg="add mod">
+          <ac:chgData name="David Beckwitt" userId="bdca50846bee3b35" providerId="LiveId" clId="{77C57F99-3B40-463A-9855-34DA2A8048A2}" dt="2026-05-22T22:49:17.798" v="405" actId="20577"/>
+          <ac:spMkLst>
+            <pc:docMk/>
+            <pc:sldMk cId="1480126713" sldId="257"/>
+            <ac:spMk id="29" creationId="{6076173C-53D9-B601-149E-5DFEA9697353}"/>
+          </ac:spMkLst>
+        </pc:spChg>
+        <pc:spChg chg="add mod">
+          <ac:chgData name="David Beckwitt" userId="bdca50846bee3b35" providerId="LiveId" clId="{77C57F99-3B40-463A-9855-34DA2A8048A2}" dt="2026-05-22T22:49:29.931" v="412" actId="1076"/>
+          <ac:spMkLst>
+            <pc:docMk/>
+            <pc:sldMk cId="1480126713" sldId="257"/>
+            <ac:spMk id="30" creationId="{38481E46-0AD7-C5E0-693E-AAAAB47D0924}"/>
+          </ac:spMkLst>
+        </pc:spChg>
+        <pc:spChg chg="add mod">
+          <ac:chgData name="David Beckwitt" userId="bdca50846bee3b35" providerId="LiveId" clId="{77C57F99-3B40-463A-9855-34DA2A8048A2}" dt="2026-05-22T22:49:34.880" v="416" actId="20577"/>
+          <ac:spMkLst>
+            <pc:docMk/>
+            <pc:sldMk cId="1480126713" sldId="257"/>
+            <ac:spMk id="31" creationId="{A5B443BA-F264-A6E4-6F8C-F28EB3AC67AD}"/>
+          </ac:spMkLst>
+        </pc:spChg>
+        <pc:spChg chg="add mod">
+          <ac:chgData name="David Beckwitt" userId="bdca50846bee3b35" providerId="LiveId" clId="{77C57F99-3B40-463A-9855-34DA2A8048A2}" dt="2026-05-22T22:49:48.792" v="423" actId="1076"/>
+          <ac:spMkLst>
+            <pc:docMk/>
+            <pc:sldMk cId="1480126713" sldId="257"/>
+            <ac:spMk id="32" creationId="{4E122B48-8C38-2077-B26C-5831A35CEEB5}"/>
+          </ac:spMkLst>
+        </pc:spChg>
+        <pc:spChg chg="add mod">
+          <ac:chgData name="David Beckwitt" userId="bdca50846bee3b35" providerId="LiveId" clId="{77C57F99-3B40-463A-9855-34DA2A8048A2}" dt="2026-05-22T22:50:02.241" v="446" actId="20577"/>
+          <ac:spMkLst>
+            <pc:docMk/>
+            <pc:sldMk cId="1480126713" sldId="257"/>
+            <ac:spMk id="33" creationId="{008960E8-BC1C-51BD-9FBF-917057A629AC}"/>
+          </ac:spMkLst>
+        </pc:spChg>
+        <pc:picChg chg="add del mod">
+          <ac:chgData name="David Beckwitt" userId="bdca50846bee3b35" providerId="LiveId" clId="{77C57F99-3B40-463A-9855-34DA2A8048A2}" dt="2026-05-22T22:46:37.470" v="317" actId="478"/>
           <ac:picMkLst>
             <pc:docMk/>
             <pc:sldMk cId="1480126713" sldId="257"/>
             <ac:picMk id="3" creationId="{FA3E60ED-0DA0-7132-6A0A-03970DE9FFD5}"/>
+          </ac:picMkLst>
+        </pc:picChg>
+        <pc:picChg chg="add del mod modCrop">
+          <ac:chgData name="David Beckwitt" userId="bdca50846bee3b35" providerId="LiveId" clId="{77C57F99-3B40-463A-9855-34DA2A8048A2}" dt="2026-05-22T22:46:52.762" v="321" actId="478"/>
+          <ac:picMkLst>
+            <pc:docMk/>
+            <pc:sldMk cId="1480126713" sldId="257"/>
+            <ac:picMk id="4" creationId="{ED0DE8E9-AA3F-172D-C67C-B5C93E806052}"/>
           </ac:picMkLst>
         </pc:picChg>
         <pc:picChg chg="add del mod">
@@ -319,6 +415,14 @@
             <ac:picMk id="5" creationId="{AD857C23-0465-5343-2967-DC572475048A}"/>
           </ac:picMkLst>
         </pc:picChg>
+        <pc:picChg chg="add mod">
+          <ac:chgData name="David Beckwitt" userId="bdca50846bee3b35" providerId="LiveId" clId="{77C57F99-3B40-463A-9855-34DA2A8048A2}" dt="2026-05-22T22:49:37.895" v="419" actId="1076"/>
+          <ac:picMkLst>
+            <pc:docMk/>
+            <pc:sldMk cId="1480126713" sldId="257"/>
+            <ac:picMk id="12" creationId="{9BD51110-7771-1C32-9094-88FA9E8CE1EA}"/>
+          </ac:picMkLst>
+        </pc:picChg>
         <pc:cxnChg chg="add mod">
           <ac:chgData name="David Beckwitt" userId="bdca50846bee3b35" providerId="LiveId" clId="{77C57F99-3B40-463A-9855-34DA2A8048A2}" dt="2026-05-22T17:09:23.846" v="297" actId="693"/>
           <ac:cxnSpMkLst>
@@ -327,8 +431,8 @@
             <ac:cxnSpMk id="5" creationId="{123316F3-25BB-254A-094B-0248AEDA554A}"/>
           </ac:cxnSpMkLst>
         </pc:cxnChg>
-        <pc:cxnChg chg="add mod">
-          <ac:chgData name="David Beckwitt" userId="bdca50846bee3b35" providerId="LiveId" clId="{77C57F99-3B40-463A-9855-34DA2A8048A2}" dt="2026-05-22T17:09:23.846" v="297" actId="693"/>
+        <pc:cxnChg chg="add del mod">
+          <ac:chgData name="David Beckwitt" userId="bdca50846bee3b35" providerId="LiveId" clId="{77C57F99-3B40-463A-9855-34DA2A8048A2}" dt="2026-05-22T22:46:37.470" v="317" actId="478"/>
           <ac:cxnSpMkLst>
             <pc:docMk/>
             <pc:sldMk cId="1480126713" sldId="257"/>
@@ -343,16 +447,16 @@
             <ac:cxnSpMk id="7" creationId="{856EFE5B-777A-4D52-29DC-A969C917C479}"/>
           </ac:cxnSpMkLst>
         </pc:cxnChg>
-        <pc:cxnChg chg="add mod">
-          <ac:chgData name="David Beckwitt" userId="bdca50846bee3b35" providerId="LiveId" clId="{77C57F99-3B40-463A-9855-34DA2A8048A2}" dt="2026-05-22T17:09:43.646" v="311" actId="14100"/>
+        <pc:cxnChg chg="add del mod">
+          <ac:chgData name="David Beckwitt" userId="bdca50846bee3b35" providerId="LiveId" clId="{77C57F99-3B40-463A-9855-34DA2A8048A2}" dt="2026-05-22T22:46:37.470" v="317" actId="478"/>
           <ac:cxnSpMkLst>
             <pc:docMk/>
             <pc:sldMk cId="1480126713" sldId="257"/>
             <ac:cxnSpMk id="8" creationId="{82D65512-12D5-343F-6715-9B5CF849DA76}"/>
           </ac:cxnSpMkLst>
         </pc:cxnChg>
-        <pc:cxnChg chg="add mod">
-          <ac:chgData name="David Beckwitt" userId="bdca50846bee3b35" providerId="LiveId" clId="{77C57F99-3B40-463A-9855-34DA2A8048A2}" dt="2026-05-22T17:09:37.519" v="301" actId="1037"/>
+        <pc:cxnChg chg="add del mod">
+          <ac:chgData name="David Beckwitt" userId="bdca50846bee3b35" providerId="LiveId" clId="{77C57F99-3B40-463A-9855-34DA2A8048A2}" dt="2026-05-22T22:46:37.470" v="317" actId="478"/>
           <ac:cxnSpMkLst>
             <pc:docMk/>
             <pc:sldMk cId="1480126713" sldId="257"/>
@@ -367,32 +471,32 @@
             <ac:cxnSpMk id="11" creationId="{46B167F0-DEBC-CA65-9130-27538F452A9D}"/>
           </ac:cxnSpMkLst>
         </pc:cxnChg>
-        <pc:cxnChg chg="add mod">
-          <ac:chgData name="David Beckwitt" userId="bdca50846bee3b35" providerId="LiveId" clId="{77C57F99-3B40-463A-9855-34DA2A8048A2}" dt="2026-05-22T17:09:51.557" v="316" actId="1037"/>
+        <pc:cxnChg chg="add del mod">
+          <ac:chgData name="David Beckwitt" userId="bdca50846bee3b35" providerId="LiveId" clId="{77C57F99-3B40-463A-9855-34DA2A8048A2}" dt="2026-05-22T22:46:37.470" v="317" actId="478"/>
           <ac:cxnSpMkLst>
             <pc:docMk/>
             <pc:sldMk cId="1480126713" sldId="257"/>
             <ac:cxnSpMk id="13" creationId="{872899B0-D4C3-B788-274A-0D6D6FF92E8C}"/>
           </ac:cxnSpMkLst>
         </pc:cxnChg>
-        <pc:cxnChg chg="add mod">
-          <ac:chgData name="David Beckwitt" userId="bdca50846bee3b35" providerId="LiveId" clId="{77C57F99-3B40-463A-9855-34DA2A8048A2}" dt="2026-05-22T17:07:42.889" v="230" actId="14100"/>
+        <pc:cxnChg chg="add del mod">
+          <ac:chgData name="David Beckwitt" userId="bdca50846bee3b35" providerId="LiveId" clId="{77C57F99-3B40-463A-9855-34DA2A8048A2}" dt="2026-05-22T22:46:37.470" v="317" actId="478"/>
           <ac:cxnSpMkLst>
             <pc:docMk/>
             <pc:sldMk cId="1480126713" sldId="257"/>
             <ac:cxnSpMk id="15" creationId="{C91BCE6C-A3C6-848C-A969-AE32BE330A39}"/>
           </ac:cxnSpMkLst>
         </pc:cxnChg>
-        <pc:cxnChg chg="add mod">
-          <ac:chgData name="David Beckwitt" userId="bdca50846bee3b35" providerId="LiveId" clId="{77C57F99-3B40-463A-9855-34DA2A8048A2}" dt="2026-05-22T17:07:57.749" v="246" actId="14100"/>
+        <pc:cxnChg chg="add del mod">
+          <ac:chgData name="David Beckwitt" userId="bdca50846bee3b35" providerId="LiveId" clId="{77C57F99-3B40-463A-9855-34DA2A8048A2}" dt="2026-05-22T22:46:37.470" v="317" actId="478"/>
           <ac:cxnSpMkLst>
             <pc:docMk/>
             <pc:sldMk cId="1480126713" sldId="257"/>
             <ac:cxnSpMk id="17" creationId="{ACC85DB0-F8D0-896F-4785-2843E00F102B}"/>
           </ac:cxnSpMkLst>
         </pc:cxnChg>
-        <pc:cxnChg chg="add mod">
-          <ac:chgData name="David Beckwitt" userId="bdca50846bee3b35" providerId="LiveId" clId="{77C57F99-3B40-463A-9855-34DA2A8048A2}" dt="2026-05-22T17:09:05.149" v="294" actId="693"/>
+        <pc:cxnChg chg="add del mod">
+          <ac:chgData name="David Beckwitt" userId="bdca50846bee3b35" providerId="LiveId" clId="{77C57F99-3B40-463A-9855-34DA2A8048A2}" dt="2026-05-22T22:46:37.470" v="317" actId="478"/>
           <ac:cxnSpMkLst>
             <pc:docMk/>
             <pc:sldMk cId="1480126713" sldId="257"/>
@@ -415,8 +519,8 @@
             <ac:cxnSpMk id="22" creationId="{A24B4914-E2F2-A401-D9EE-27A3036B8CC8}"/>
           </ac:cxnSpMkLst>
         </pc:cxnChg>
-        <pc:cxnChg chg="add mod">
-          <ac:chgData name="David Beckwitt" userId="bdca50846bee3b35" providerId="LiveId" clId="{77C57F99-3B40-463A-9855-34DA2A8048A2}" dt="2026-05-22T17:09:05.149" v="294" actId="693"/>
+        <pc:cxnChg chg="add del mod">
+          <ac:chgData name="David Beckwitt" userId="bdca50846bee3b35" providerId="LiveId" clId="{77C57F99-3B40-463A-9855-34DA2A8048A2}" dt="2026-05-22T22:46:37.470" v="317" actId="478"/>
           <ac:cxnSpMkLst>
             <pc:docMk/>
             <pc:sldMk cId="1480126713" sldId="257"/>
@@ -431,8 +535,8 @@
             <ac:cxnSpMk id="24" creationId="{BBBD510A-E1B2-27D5-FADE-AFE6E07526BE}"/>
           </ac:cxnSpMkLst>
         </pc:cxnChg>
-        <pc:cxnChg chg="add mod">
-          <ac:chgData name="David Beckwitt" userId="bdca50846bee3b35" providerId="LiveId" clId="{77C57F99-3B40-463A-9855-34DA2A8048A2}" dt="2026-05-22T17:09:09.759" v="296" actId="1076"/>
+        <pc:cxnChg chg="add del mod">
+          <ac:chgData name="David Beckwitt" userId="bdca50846bee3b35" providerId="LiveId" clId="{77C57F99-3B40-463A-9855-34DA2A8048A2}" dt="2026-05-22T22:46:37.470" v="317" actId="478"/>
           <ac:cxnSpMkLst>
             <pc:docMk/>
             <pc:sldMk cId="1480126713" sldId="257"/>
@@ -4668,10 +4772,10 @@
       </p:grpSpPr>
       <p:pic>
         <p:nvPicPr>
-          <p:cNvPr id="3" name="Picture 2">
-            <a:extLst>
-              <a:ext uri="{FF2B5EF4-FFF2-40B4-BE49-F238E27FC236}">
-                <a16:creationId xmlns:a16="http://schemas.microsoft.com/office/drawing/2014/main" id="{FA3E60ED-0DA0-7132-6A0A-03970DE9FFD5}"/>
+          <p:cNvPr id="12" name="Picture 11">
+            <a:extLst>
+              <a:ext uri="{FF2B5EF4-FFF2-40B4-BE49-F238E27FC236}">
+                <a16:creationId xmlns:a16="http://schemas.microsoft.com/office/drawing/2014/main" id="{9BD51110-7771-1C32-9094-88FA9E8CE1EA}"/>
               </a:ext>
             </a:extLst>
           </p:cNvPr>
@@ -4694,593 +4798,631 @@
         </p:blipFill>
         <p:spPr>
           <a:xfrm>
-            <a:off x="2667000" y="0"/>
-            <a:ext cx="6858000" cy="6858000"/>
+            <a:off x="4384374" y="2476500"/>
+            <a:ext cx="4381500" cy="4381500"/>
           </a:xfrm>
           <a:prstGeom prst="rect">
             <a:avLst/>
           </a:prstGeom>
         </p:spPr>
       </p:pic>
-      <p:cxnSp>
-        <p:nvCxnSpPr>
-          <p:cNvPr id="5" name="Straight Connector 4">
-            <a:extLst>
-              <a:ext uri="{FF2B5EF4-FFF2-40B4-BE49-F238E27FC236}">
-                <a16:creationId xmlns:a16="http://schemas.microsoft.com/office/drawing/2014/main" id="{123316F3-25BB-254A-094B-0248AEDA554A}"/>
-              </a:ext>
-            </a:extLst>
-          </p:cNvPr>
-          <p:cNvCxnSpPr/>
-          <p:nvPr/>
-        </p:nvCxnSpPr>
-        <p:spPr>
-          <a:xfrm flipV="1">
-            <a:off x="8171234" y="4649821"/>
-            <a:ext cx="0" cy="350196"/>
-          </a:xfrm>
-          <a:prstGeom prst="line">
-            <a:avLst/>
-          </a:prstGeom>
-          <a:ln>
-            <a:prstDash val="sysDot"/>
-          </a:ln>
-        </p:spPr>
-        <p:style>
-          <a:lnRef idx="2">
-            <a:schemeClr val="dk1"/>
-          </a:lnRef>
-          <a:fillRef idx="0">
-            <a:schemeClr val="dk1"/>
-          </a:fillRef>
-          <a:effectRef idx="1">
-            <a:schemeClr val="dk1"/>
-          </a:effectRef>
-          <a:fontRef idx="minor">
-            <a:schemeClr val="tx1"/>
-          </a:fontRef>
-        </p:style>
-      </p:cxnSp>
-      <p:cxnSp>
-        <p:nvCxnSpPr>
-          <p:cNvPr id="6" name="Straight Connector 5">
-            <a:extLst>
-              <a:ext uri="{FF2B5EF4-FFF2-40B4-BE49-F238E27FC236}">
-                <a16:creationId xmlns:a16="http://schemas.microsoft.com/office/drawing/2014/main" id="{4F40CFE6-98EA-1925-7900-CCAA0C1B93B2}"/>
-              </a:ext>
-            </a:extLst>
-          </p:cNvPr>
-          <p:cNvCxnSpPr/>
-          <p:nvPr/>
-        </p:nvCxnSpPr>
-        <p:spPr>
-          <a:xfrm flipV="1">
-            <a:off x="6287800" y="3007926"/>
-            <a:ext cx="0" cy="350196"/>
-          </a:xfrm>
-          <a:prstGeom prst="line">
-            <a:avLst/>
-          </a:prstGeom>
-          <a:ln>
-            <a:prstDash val="sysDot"/>
-          </a:ln>
-        </p:spPr>
-        <p:style>
-          <a:lnRef idx="2">
-            <a:schemeClr val="dk1"/>
-          </a:lnRef>
-          <a:fillRef idx="0">
-            <a:schemeClr val="dk1"/>
-          </a:fillRef>
-          <a:effectRef idx="1">
-            <a:schemeClr val="dk1"/>
-          </a:effectRef>
-          <a:fontRef idx="minor">
-            <a:schemeClr val="tx1"/>
-          </a:fontRef>
-        </p:style>
-      </p:cxnSp>
-      <p:cxnSp>
-        <p:nvCxnSpPr>
-          <p:cNvPr id="7" name="Straight Connector 6">
-            <a:extLst>
-              <a:ext uri="{FF2B5EF4-FFF2-40B4-BE49-F238E27FC236}">
-                <a16:creationId xmlns:a16="http://schemas.microsoft.com/office/drawing/2014/main" id="{856EFE5B-777A-4D52-29DC-A969C917C479}"/>
-              </a:ext>
-            </a:extLst>
-          </p:cNvPr>
-          <p:cNvCxnSpPr/>
-          <p:nvPr/>
-        </p:nvCxnSpPr>
-        <p:spPr>
-          <a:xfrm flipV="1">
-            <a:off x="4412992" y="1426416"/>
-            <a:ext cx="0" cy="350196"/>
-          </a:xfrm>
-          <a:prstGeom prst="line">
-            <a:avLst/>
-          </a:prstGeom>
-          <a:ln>
-            <a:prstDash val="sysDot"/>
-          </a:ln>
-        </p:spPr>
-        <p:style>
-          <a:lnRef idx="2">
-            <a:schemeClr val="dk1"/>
-          </a:lnRef>
-          <a:fillRef idx="0">
-            <a:schemeClr val="dk1"/>
-          </a:fillRef>
-          <a:effectRef idx="1">
-            <a:schemeClr val="dk1"/>
-          </a:effectRef>
-          <a:fontRef idx="minor">
-            <a:schemeClr val="tx1"/>
-          </a:fontRef>
-        </p:style>
-      </p:cxnSp>
-      <p:cxnSp>
-        <p:nvCxnSpPr>
-          <p:cNvPr id="8" name="Straight Connector 7">
-            <a:extLst>
-              <a:ext uri="{FF2B5EF4-FFF2-40B4-BE49-F238E27FC236}">
-                <a16:creationId xmlns:a16="http://schemas.microsoft.com/office/drawing/2014/main" id="{82D65512-12D5-343F-6715-9B5CF849DA76}"/>
-              </a:ext>
-            </a:extLst>
-          </p:cNvPr>
-          <p:cNvCxnSpPr>
-            <a:cxnSpLocks/>
-          </p:cNvCxnSpPr>
-          <p:nvPr/>
-        </p:nvCxnSpPr>
-        <p:spPr>
-          <a:xfrm flipV="1">
-            <a:off x="6345878" y="4649821"/>
-            <a:ext cx="108699" cy="424529"/>
-          </a:xfrm>
-          <a:prstGeom prst="line">
-            <a:avLst/>
-          </a:prstGeom>
-        </p:spPr>
-        <p:style>
-          <a:lnRef idx="2">
-            <a:schemeClr val="dk1"/>
-          </a:lnRef>
-          <a:fillRef idx="0">
-            <a:schemeClr val="dk1"/>
-          </a:fillRef>
-          <a:effectRef idx="1">
-            <a:schemeClr val="dk1"/>
-          </a:effectRef>
-          <a:fontRef idx="minor">
-            <a:schemeClr val="tx1"/>
-          </a:fontRef>
-        </p:style>
-      </p:cxnSp>
-      <p:cxnSp>
-        <p:nvCxnSpPr>
-          <p:cNvPr id="10" name="Straight Connector 9">
-            <a:extLst>
-              <a:ext uri="{FF2B5EF4-FFF2-40B4-BE49-F238E27FC236}">
-                <a16:creationId xmlns:a16="http://schemas.microsoft.com/office/drawing/2014/main" id="{184D6841-3F37-2B8A-C3DB-873E2C4199E4}"/>
-              </a:ext>
-            </a:extLst>
-          </p:cNvPr>
-          <p:cNvCxnSpPr>
-            <a:cxnSpLocks/>
-          </p:cNvCxnSpPr>
-          <p:nvPr/>
-        </p:nvCxnSpPr>
-        <p:spPr>
-          <a:xfrm flipV="1">
-            <a:off x="4443903" y="3007926"/>
-            <a:ext cx="68001" cy="443650"/>
-          </a:xfrm>
-          <a:prstGeom prst="line">
-            <a:avLst/>
-          </a:prstGeom>
-        </p:spPr>
-        <p:style>
-          <a:lnRef idx="2">
-            <a:schemeClr val="dk1"/>
-          </a:lnRef>
-          <a:fillRef idx="0">
-            <a:schemeClr val="dk1"/>
-          </a:fillRef>
-          <a:effectRef idx="1">
-            <a:schemeClr val="dk1"/>
-          </a:effectRef>
-          <a:fontRef idx="minor">
-            <a:schemeClr val="tx1"/>
-          </a:fontRef>
-        </p:style>
-      </p:cxnSp>
-      <p:cxnSp>
-        <p:nvCxnSpPr>
-          <p:cNvPr id="11" name="Straight Connector 10">
-            <a:extLst>
-              <a:ext uri="{FF2B5EF4-FFF2-40B4-BE49-F238E27FC236}">
-                <a16:creationId xmlns:a16="http://schemas.microsoft.com/office/drawing/2014/main" id="{46B167F0-DEBC-CA65-9130-27538F452A9D}"/>
-              </a:ext>
-            </a:extLst>
-          </p:cNvPr>
-          <p:cNvCxnSpPr>
-            <a:cxnSpLocks/>
-          </p:cNvCxnSpPr>
-          <p:nvPr/>
-        </p:nvCxnSpPr>
-        <p:spPr>
-          <a:xfrm flipV="1">
-            <a:off x="6287800" y="1360388"/>
-            <a:ext cx="0" cy="447747"/>
-          </a:xfrm>
-          <a:prstGeom prst="line">
-            <a:avLst/>
-          </a:prstGeom>
-        </p:spPr>
-        <p:style>
-          <a:lnRef idx="2">
-            <a:schemeClr val="dk1"/>
-          </a:lnRef>
-          <a:fillRef idx="0">
-            <a:schemeClr val="dk1"/>
-          </a:fillRef>
-          <a:effectRef idx="1">
-            <a:schemeClr val="dk1"/>
-          </a:effectRef>
-          <a:fontRef idx="minor">
-            <a:schemeClr val="tx1"/>
-          </a:fontRef>
-        </p:style>
-      </p:cxnSp>
-      <p:cxnSp>
-        <p:nvCxnSpPr>
-          <p:cNvPr id="13" name="Straight Connector 12">
-            <a:extLst>
-              <a:ext uri="{FF2B5EF4-FFF2-40B4-BE49-F238E27FC236}">
-                <a16:creationId xmlns:a16="http://schemas.microsoft.com/office/drawing/2014/main" id="{872899B0-D4C3-B788-274A-0D6D6FF92E8C}"/>
-              </a:ext>
-            </a:extLst>
-          </p:cNvPr>
-          <p:cNvCxnSpPr>
-            <a:cxnSpLocks/>
-          </p:cNvCxnSpPr>
-          <p:nvPr/>
-        </p:nvCxnSpPr>
-        <p:spPr>
-          <a:xfrm flipH="1" flipV="1">
-            <a:off x="8085551" y="1472192"/>
-            <a:ext cx="24168" cy="350271"/>
-          </a:xfrm>
-          <a:prstGeom prst="line">
-            <a:avLst/>
-          </a:prstGeom>
-        </p:spPr>
-        <p:style>
-          <a:lnRef idx="2">
-            <a:schemeClr val="dk1"/>
-          </a:lnRef>
-          <a:fillRef idx="0">
-            <a:schemeClr val="dk1"/>
-          </a:fillRef>
-          <a:effectRef idx="1">
-            <a:schemeClr val="dk1"/>
-          </a:effectRef>
-          <a:fontRef idx="minor">
-            <a:schemeClr val="tx1"/>
-          </a:fontRef>
-        </p:style>
-      </p:cxnSp>
-      <p:cxnSp>
-        <p:nvCxnSpPr>
-          <p:cNvPr id="15" name="Straight Connector 14">
-            <a:extLst>
-              <a:ext uri="{FF2B5EF4-FFF2-40B4-BE49-F238E27FC236}">
-                <a16:creationId xmlns:a16="http://schemas.microsoft.com/office/drawing/2014/main" id="{C91BCE6C-A3C6-848C-A969-AE32BE330A39}"/>
-              </a:ext>
-            </a:extLst>
-          </p:cNvPr>
-          <p:cNvCxnSpPr>
-            <a:cxnSpLocks/>
-          </p:cNvCxnSpPr>
-          <p:nvPr/>
-        </p:nvCxnSpPr>
-        <p:spPr>
-          <a:xfrm flipV="1">
-            <a:off x="4520530" y="4589253"/>
-            <a:ext cx="318889" cy="485097"/>
-          </a:xfrm>
-          <a:prstGeom prst="line">
-            <a:avLst/>
-          </a:prstGeom>
-        </p:spPr>
-        <p:style>
-          <a:lnRef idx="2">
-            <a:schemeClr val="dk1"/>
-          </a:lnRef>
-          <a:fillRef idx="0">
-            <a:schemeClr val="dk1"/>
-          </a:fillRef>
-          <a:effectRef idx="1">
-            <a:schemeClr val="dk1"/>
-          </a:effectRef>
-          <a:fontRef idx="minor">
-            <a:schemeClr val="tx1"/>
-          </a:fontRef>
-        </p:style>
-      </p:cxnSp>
-      <p:cxnSp>
-        <p:nvCxnSpPr>
-          <p:cNvPr id="17" name="Straight Connector 16">
-            <a:extLst>
-              <a:ext uri="{FF2B5EF4-FFF2-40B4-BE49-F238E27FC236}">
-                <a16:creationId xmlns:a16="http://schemas.microsoft.com/office/drawing/2014/main" id="{ACC85DB0-F8D0-896F-4785-2843E00F102B}"/>
-              </a:ext>
-            </a:extLst>
-          </p:cNvPr>
-          <p:cNvCxnSpPr>
-            <a:cxnSpLocks/>
-          </p:cNvCxnSpPr>
-          <p:nvPr/>
-        </p:nvCxnSpPr>
-        <p:spPr>
-          <a:xfrm flipH="1" flipV="1">
-            <a:off x="8126083" y="2924355"/>
-            <a:ext cx="27899" cy="455636"/>
-          </a:xfrm>
-          <a:prstGeom prst="line">
-            <a:avLst/>
-          </a:prstGeom>
-        </p:spPr>
-        <p:style>
-          <a:lnRef idx="2">
-            <a:schemeClr val="dk1"/>
-          </a:lnRef>
-          <a:fillRef idx="0">
-            <a:schemeClr val="dk1"/>
-          </a:fillRef>
-          <a:effectRef idx="1">
-            <a:schemeClr val="dk1"/>
-          </a:effectRef>
-          <a:fontRef idx="minor">
-            <a:schemeClr val="tx1"/>
-          </a:fontRef>
-        </p:style>
-      </p:cxnSp>
-      <p:cxnSp>
-        <p:nvCxnSpPr>
-          <p:cNvPr id="20" name="Straight Connector 19">
-            <a:extLst>
-              <a:ext uri="{FF2B5EF4-FFF2-40B4-BE49-F238E27FC236}">
-                <a16:creationId xmlns:a16="http://schemas.microsoft.com/office/drawing/2014/main" id="{E023FB43-DF49-4607-A9E1-809EF8F5A87E}"/>
-              </a:ext>
-            </a:extLst>
-          </p:cNvPr>
-          <p:cNvCxnSpPr/>
-          <p:nvPr/>
-        </p:nvCxnSpPr>
-        <p:spPr>
-          <a:xfrm flipV="1">
-            <a:off x="4404366" y="3059682"/>
-            <a:ext cx="0" cy="350196"/>
-          </a:xfrm>
-          <a:prstGeom prst="line">
-            <a:avLst/>
-          </a:prstGeom>
-          <a:ln>
-            <a:prstDash val="sysDot"/>
-          </a:ln>
-        </p:spPr>
-        <p:style>
-          <a:lnRef idx="2">
-            <a:schemeClr val="dk1"/>
-          </a:lnRef>
-          <a:fillRef idx="0">
-            <a:schemeClr val="dk1"/>
-          </a:fillRef>
-          <a:effectRef idx="1">
-            <a:schemeClr val="dk1"/>
-          </a:effectRef>
-          <a:fontRef idx="minor">
-            <a:schemeClr val="tx1"/>
-          </a:fontRef>
-        </p:style>
-      </p:cxnSp>
-      <p:cxnSp>
-        <p:nvCxnSpPr>
-          <p:cNvPr id="21" name="Straight Connector 20">
-            <a:extLst>
-              <a:ext uri="{FF2B5EF4-FFF2-40B4-BE49-F238E27FC236}">
-                <a16:creationId xmlns:a16="http://schemas.microsoft.com/office/drawing/2014/main" id="{0CFFC1C2-F07F-FE0E-A07E-0C67D111BDEE}"/>
-              </a:ext>
-            </a:extLst>
-          </p:cNvPr>
-          <p:cNvCxnSpPr/>
-          <p:nvPr/>
-        </p:nvCxnSpPr>
-        <p:spPr>
-          <a:xfrm flipV="1">
-            <a:off x="4412992" y="4665329"/>
-            <a:ext cx="0" cy="350196"/>
-          </a:xfrm>
-          <a:prstGeom prst="line">
-            <a:avLst/>
-          </a:prstGeom>
-          <a:ln>
-            <a:prstDash val="sysDot"/>
-          </a:ln>
-        </p:spPr>
-        <p:style>
-          <a:lnRef idx="2">
-            <a:schemeClr val="dk1"/>
-          </a:lnRef>
-          <a:fillRef idx="0">
-            <a:schemeClr val="dk1"/>
-          </a:fillRef>
-          <a:effectRef idx="1">
-            <a:schemeClr val="dk1"/>
-          </a:effectRef>
-          <a:fontRef idx="minor">
-            <a:schemeClr val="tx1"/>
-          </a:fontRef>
-        </p:style>
-      </p:cxnSp>
-      <p:cxnSp>
-        <p:nvCxnSpPr>
-          <p:cNvPr id="22" name="Straight Connector 21">
-            <a:extLst>
-              <a:ext uri="{FF2B5EF4-FFF2-40B4-BE49-F238E27FC236}">
-                <a16:creationId xmlns:a16="http://schemas.microsoft.com/office/drawing/2014/main" id="{A24B4914-E2F2-A401-D9EE-27A3036B8CC8}"/>
-              </a:ext>
-            </a:extLst>
-          </p:cNvPr>
-          <p:cNvCxnSpPr/>
-          <p:nvPr/>
-        </p:nvCxnSpPr>
-        <p:spPr>
-          <a:xfrm flipV="1">
-            <a:off x="6307071" y="4667073"/>
-            <a:ext cx="0" cy="350196"/>
-          </a:xfrm>
-          <a:prstGeom prst="line">
-            <a:avLst/>
-          </a:prstGeom>
-          <a:ln>
-            <a:prstDash val="sysDot"/>
-          </a:ln>
-        </p:spPr>
-        <p:style>
-          <a:lnRef idx="2">
-            <a:schemeClr val="dk1"/>
-          </a:lnRef>
-          <a:fillRef idx="0">
-            <a:schemeClr val="dk1"/>
-          </a:fillRef>
-          <a:effectRef idx="1">
-            <a:schemeClr val="dk1"/>
-          </a:effectRef>
-          <a:fontRef idx="minor">
-            <a:schemeClr val="tx1"/>
-          </a:fontRef>
-        </p:style>
-      </p:cxnSp>
-      <p:cxnSp>
-        <p:nvCxnSpPr>
-          <p:cNvPr id="23" name="Straight Connector 22">
-            <a:extLst>
-              <a:ext uri="{FF2B5EF4-FFF2-40B4-BE49-F238E27FC236}">
-                <a16:creationId xmlns:a16="http://schemas.microsoft.com/office/drawing/2014/main" id="{5A5C705B-CEF2-1E00-787D-F5A7DB080AE6}"/>
-              </a:ext>
-            </a:extLst>
-          </p:cNvPr>
-          <p:cNvCxnSpPr/>
-          <p:nvPr/>
-        </p:nvCxnSpPr>
-        <p:spPr>
-          <a:xfrm flipV="1">
-            <a:off x="8176130" y="1466565"/>
-            <a:ext cx="0" cy="350196"/>
-          </a:xfrm>
-          <a:prstGeom prst="line">
-            <a:avLst/>
-          </a:prstGeom>
-          <a:ln>
-            <a:prstDash val="sysDot"/>
-          </a:ln>
-        </p:spPr>
-        <p:style>
-          <a:lnRef idx="2">
-            <a:schemeClr val="dk1"/>
-          </a:lnRef>
-          <a:fillRef idx="0">
-            <a:schemeClr val="dk1"/>
-          </a:fillRef>
-          <a:effectRef idx="1">
-            <a:schemeClr val="dk1"/>
-          </a:effectRef>
-          <a:fontRef idx="minor">
-            <a:schemeClr val="tx1"/>
-          </a:fontRef>
-        </p:style>
-      </p:cxnSp>
-      <p:cxnSp>
-        <p:nvCxnSpPr>
-          <p:cNvPr id="24" name="Straight Connector 23">
-            <a:extLst>
-              <a:ext uri="{FF2B5EF4-FFF2-40B4-BE49-F238E27FC236}">
-                <a16:creationId xmlns:a16="http://schemas.microsoft.com/office/drawing/2014/main" id="{BBBD510A-E1B2-27D5-FADE-AFE6E07526BE}"/>
-              </a:ext>
-            </a:extLst>
-          </p:cNvPr>
-          <p:cNvCxnSpPr/>
-          <p:nvPr/>
-        </p:nvCxnSpPr>
-        <p:spPr>
-          <a:xfrm flipV="1">
-            <a:off x="6303343" y="1432061"/>
-            <a:ext cx="0" cy="350196"/>
-          </a:xfrm>
-          <a:prstGeom prst="line">
-            <a:avLst/>
-          </a:prstGeom>
-          <a:ln>
-            <a:prstDash val="sysDot"/>
-          </a:ln>
-        </p:spPr>
-        <p:style>
-          <a:lnRef idx="2">
-            <a:schemeClr val="dk1"/>
-          </a:lnRef>
-          <a:fillRef idx="0">
-            <a:schemeClr val="dk1"/>
-          </a:fillRef>
-          <a:effectRef idx="1">
-            <a:schemeClr val="dk1"/>
-          </a:effectRef>
-          <a:fontRef idx="minor">
-            <a:schemeClr val="tx1"/>
-          </a:fontRef>
-        </p:style>
-      </p:cxnSp>
-      <p:cxnSp>
-        <p:nvCxnSpPr>
-          <p:cNvPr id="26" name="Straight Connector 25">
-            <a:extLst>
-              <a:ext uri="{FF2B5EF4-FFF2-40B4-BE49-F238E27FC236}">
-                <a16:creationId xmlns:a16="http://schemas.microsoft.com/office/drawing/2014/main" id="{80E18C60-09C0-6779-3E47-3DCAB8275251}"/>
-              </a:ext>
-            </a:extLst>
-          </p:cNvPr>
-          <p:cNvCxnSpPr/>
-          <p:nvPr/>
-        </p:nvCxnSpPr>
-        <p:spPr>
-          <a:xfrm flipV="1">
-            <a:off x="8173252" y="3059682"/>
-            <a:ext cx="0" cy="350196"/>
-          </a:xfrm>
-          <a:prstGeom prst="line">
-            <a:avLst/>
-          </a:prstGeom>
-          <a:ln>
-            <a:prstDash val="sysDot"/>
-          </a:ln>
-        </p:spPr>
-        <p:style>
-          <a:lnRef idx="2">
-            <a:schemeClr val="dk1"/>
-          </a:lnRef>
-          <a:fillRef idx="0">
-            <a:schemeClr val="dk1"/>
-          </a:fillRef>
-          <a:effectRef idx="1">
-            <a:schemeClr val="dk1"/>
-          </a:effectRef>
-          <a:fontRef idx="minor">
-            <a:schemeClr val="tx1"/>
-          </a:fontRef>
-        </p:style>
-      </p:cxnSp>
+      <mc:AlternateContent xmlns:mc="http://schemas.openxmlformats.org/markup-compatibility/2006">
+        <mc:Choice xmlns:a14="http://schemas.microsoft.com/office/drawing/2010/main" Requires="a14">
+          <p:sp>
+            <p:nvSpPr>
+              <p:cNvPr id="28" name="TextBox 27">
+                <a:extLst>
+                  <a:ext uri="{FF2B5EF4-FFF2-40B4-BE49-F238E27FC236}">
+                    <a16:creationId xmlns:a16="http://schemas.microsoft.com/office/drawing/2014/main" id="{88C912C9-CE2C-67FF-5F8B-27CF6908D9FC}"/>
+                  </a:ext>
+                </a:extLst>
+              </p:cNvPr>
+              <p:cNvSpPr txBox="1"/>
+              <p:nvPr/>
+            </p:nvSpPr>
+            <p:spPr>
+              <a:xfrm>
+                <a:off x="7225885" y="1838920"/>
+                <a:ext cx="1131399" cy="769441"/>
+              </a:xfrm>
+              <a:prstGeom prst="rect">
+                <a:avLst/>
+              </a:prstGeom>
+              <a:noFill/>
+            </p:spPr>
+            <p:txBody>
+              <a:bodyPr wrap="none" rtlCol="0">
+                <a:spAutoFit/>
+              </a:bodyPr>
+              <a:lstStyle/>
+              <a:p>
+                <a14:m>
+                  <m:oMathPara xmlns:m="http://schemas.openxmlformats.org/officeDocument/2006/math">
+                    <m:oMathParaPr>
+                      <m:jc m:val="centerGroup"/>
+                    </m:oMathParaPr>
+                    <m:oMath xmlns:m="http://schemas.openxmlformats.org/officeDocument/2006/math">
+                      <m:sSup>
+                        <m:sSupPr>
+                          <m:ctrlPr>
+                            <a:rPr lang="en-US" sz="4400" b="0" i="1" smtClean="0">
+                              <a:latin typeface="Cambria Math" panose="02040503050406030204" pitchFamily="18" charset="0"/>
+                            </a:rPr>
+                          </m:ctrlPr>
+                        </m:sSupPr>
+                        <m:e>
+                          <m:r>
+                            <a:rPr lang="en-US" sz="4400" b="0" i="1" smtClean="0">
+                              <a:latin typeface="Cambria Math" panose="02040503050406030204" pitchFamily="18" charset="0"/>
+                            </a:rPr>
+                            <m:t>10</m:t>
+                          </m:r>
+                        </m:e>
+                        <m:sup>
+                          <m:r>
+                            <a:rPr lang="en-US" sz="4400" b="0" i="1" smtClean="0">
+                              <a:latin typeface="Cambria Math" panose="02040503050406030204" pitchFamily="18" charset="0"/>
+                            </a:rPr>
+                            <m:t>∘</m:t>
+                          </m:r>
+                        </m:sup>
+                      </m:sSup>
+                    </m:oMath>
+                  </m:oMathPara>
+                </a14:m>
+                <a:endParaRPr lang="en-US" sz="4400" dirty="0"/>
+              </a:p>
+            </p:txBody>
+          </p:sp>
+        </mc:Choice>
+        <mc:Fallback>
+          <p:sp>
+            <p:nvSpPr>
+              <p:cNvPr id="28" name="TextBox 27">
+                <a:extLst>
+                  <a:ext uri="{FF2B5EF4-FFF2-40B4-BE49-F238E27FC236}">
+                    <a16:creationId xmlns:a16="http://schemas.microsoft.com/office/drawing/2014/main" id="{88C912C9-CE2C-67FF-5F8B-27CF6908D9FC}"/>
+                  </a:ext>
+                </a:extLst>
+              </p:cNvPr>
+              <p:cNvSpPr txBox="1">
+                <a:spLocks noRot="1" noChangeAspect="1" noMove="1" noResize="1" noEditPoints="1" noAdjustHandles="1" noChangeArrowheads="1" noChangeShapeType="1" noTextEdit="1"/>
+              </p:cNvSpPr>
+              <p:nvPr/>
+            </p:nvSpPr>
+            <p:spPr>
+              <a:xfrm>
+                <a:off x="7225885" y="1838920"/>
+                <a:ext cx="1131399" cy="769441"/>
+              </a:xfrm>
+              <a:prstGeom prst="rect">
+                <a:avLst/>
+              </a:prstGeom>
+              <a:blipFill>
+                <a:blip r:embed="rId3"/>
+                <a:stretch>
+                  <a:fillRect/>
+                </a:stretch>
+              </a:blipFill>
+            </p:spPr>
+            <p:txBody>
+              <a:bodyPr/>
+              <a:lstStyle/>
+              <a:p>
+                <a:r>
+                  <a:rPr lang="en-US">
+                    <a:noFill/>
+                  </a:rPr>
+                  <a:t> </a:t>
+                </a:r>
+              </a:p>
+            </p:txBody>
+          </p:sp>
+        </mc:Fallback>
+      </mc:AlternateContent>
+      <mc:AlternateContent xmlns:mc="http://schemas.openxmlformats.org/markup-compatibility/2006">
+        <mc:Choice xmlns:a14="http://schemas.microsoft.com/office/drawing/2010/main" Requires="a14">
+          <p:sp>
+            <p:nvSpPr>
+              <p:cNvPr id="29" name="TextBox 28">
+                <a:extLst>
+                  <a:ext uri="{FF2B5EF4-FFF2-40B4-BE49-F238E27FC236}">
+                    <a16:creationId xmlns:a16="http://schemas.microsoft.com/office/drawing/2014/main" id="{6076173C-53D9-B601-149E-5DFEA9697353}"/>
+                  </a:ext>
+                </a:extLst>
+              </p:cNvPr>
+              <p:cNvSpPr txBox="1"/>
+              <p:nvPr/>
+            </p:nvSpPr>
+            <p:spPr>
+              <a:xfrm>
+                <a:off x="4964601" y="1772990"/>
+                <a:ext cx="818814" cy="769441"/>
+              </a:xfrm>
+              <a:prstGeom prst="rect">
+                <a:avLst/>
+              </a:prstGeom>
+              <a:noFill/>
+            </p:spPr>
+            <p:txBody>
+              <a:bodyPr wrap="none" rtlCol="0">
+                <a:spAutoFit/>
+              </a:bodyPr>
+              <a:lstStyle/>
+              <a:p>
+                <a14:m>
+                  <m:oMathPara xmlns:m="http://schemas.openxmlformats.org/officeDocument/2006/math">
+                    <m:oMathParaPr>
+                      <m:jc m:val="centerGroup"/>
+                    </m:oMathParaPr>
+                    <m:oMath xmlns:m="http://schemas.openxmlformats.org/officeDocument/2006/math">
+                      <m:sSup>
+                        <m:sSupPr>
+                          <m:ctrlPr>
+                            <a:rPr lang="en-US" sz="4400" b="0" i="1" smtClean="0">
+                              <a:latin typeface="Cambria Math" panose="02040503050406030204" pitchFamily="18" charset="0"/>
+                            </a:rPr>
+                          </m:ctrlPr>
+                        </m:sSupPr>
+                        <m:e>
+                          <m:r>
+                            <a:rPr lang="en-US" sz="4400" b="0" i="1" smtClean="0">
+                              <a:latin typeface="Cambria Math" panose="02040503050406030204" pitchFamily="18" charset="0"/>
+                            </a:rPr>
+                            <m:t>0</m:t>
+                          </m:r>
+                        </m:e>
+                        <m:sup>
+                          <m:r>
+                            <a:rPr lang="en-US" sz="4400" b="0" i="1" smtClean="0">
+                              <a:latin typeface="Cambria Math" panose="02040503050406030204" pitchFamily="18" charset="0"/>
+                            </a:rPr>
+                            <m:t>∘</m:t>
+                          </m:r>
+                        </m:sup>
+                      </m:sSup>
+                    </m:oMath>
+                  </m:oMathPara>
+                </a14:m>
+                <a:endParaRPr lang="en-US" sz="4400" dirty="0"/>
+              </a:p>
+            </p:txBody>
+          </p:sp>
+        </mc:Choice>
+        <mc:Fallback>
+          <p:sp>
+            <p:nvSpPr>
+              <p:cNvPr id="29" name="TextBox 28">
+                <a:extLst>
+                  <a:ext uri="{FF2B5EF4-FFF2-40B4-BE49-F238E27FC236}">
+                    <a16:creationId xmlns:a16="http://schemas.microsoft.com/office/drawing/2014/main" id="{6076173C-53D9-B601-149E-5DFEA9697353}"/>
+                  </a:ext>
+                </a:extLst>
+              </p:cNvPr>
+              <p:cNvSpPr txBox="1">
+                <a:spLocks noRot="1" noChangeAspect="1" noMove="1" noResize="1" noEditPoints="1" noAdjustHandles="1" noChangeArrowheads="1" noChangeShapeType="1" noTextEdit="1"/>
+              </p:cNvSpPr>
+              <p:nvPr/>
+            </p:nvSpPr>
+            <p:spPr>
+              <a:xfrm>
+                <a:off x="4964601" y="1772990"/>
+                <a:ext cx="818814" cy="769441"/>
+              </a:xfrm>
+              <a:prstGeom prst="rect">
+                <a:avLst/>
+              </a:prstGeom>
+              <a:blipFill>
+                <a:blip r:embed="rId4"/>
+                <a:stretch>
+                  <a:fillRect/>
+                </a:stretch>
+              </a:blipFill>
+            </p:spPr>
+            <p:txBody>
+              <a:bodyPr/>
+              <a:lstStyle/>
+              <a:p>
+                <a:r>
+                  <a:rPr lang="en-US">
+                    <a:noFill/>
+                  </a:rPr>
+                  <a:t> </a:t>
+                </a:r>
+              </a:p>
+            </p:txBody>
+          </p:sp>
+        </mc:Fallback>
+      </mc:AlternateContent>
+      <mc:AlternateContent xmlns:mc="http://schemas.openxmlformats.org/markup-compatibility/2006">
+        <mc:Choice xmlns:a14="http://schemas.microsoft.com/office/drawing/2010/main" Requires="a14">
+          <p:sp>
+            <p:nvSpPr>
+              <p:cNvPr id="30" name="TextBox 29">
+                <a:extLst>
+                  <a:ext uri="{FF2B5EF4-FFF2-40B4-BE49-F238E27FC236}">
+                    <a16:creationId xmlns:a16="http://schemas.microsoft.com/office/drawing/2014/main" id="{38481E46-0AD7-C5E0-693E-AAAAB47D0924}"/>
+                  </a:ext>
+                </a:extLst>
+              </p:cNvPr>
+              <p:cNvSpPr txBox="1"/>
+              <p:nvPr/>
+            </p:nvSpPr>
+            <p:spPr>
+              <a:xfrm>
+                <a:off x="3771706" y="2927448"/>
+                <a:ext cx="612668" cy="769441"/>
+              </a:xfrm>
+              <a:prstGeom prst="rect">
+                <a:avLst/>
+              </a:prstGeom>
+              <a:noFill/>
+            </p:spPr>
+            <p:txBody>
+              <a:bodyPr wrap="none" rtlCol="0">
+                <a:spAutoFit/>
+              </a:bodyPr>
+              <a:lstStyle/>
+              <a:p>
+                <a14:m>
+                  <m:oMathPara xmlns:m="http://schemas.openxmlformats.org/officeDocument/2006/math">
+                    <m:oMathParaPr>
+                      <m:jc m:val="centerGroup"/>
+                    </m:oMathParaPr>
+                    <m:oMath xmlns:m="http://schemas.openxmlformats.org/officeDocument/2006/math">
+                      <m:r>
+                        <a:rPr lang="en-US" sz="4400" b="0" i="1" smtClean="0">
+                          <a:latin typeface="Cambria Math" panose="02040503050406030204" pitchFamily="18" charset="0"/>
+                        </a:rPr>
+                        <m:t>3</m:t>
+                      </m:r>
+                    </m:oMath>
+                  </m:oMathPara>
+                </a14:m>
+                <a:endParaRPr lang="en-US" sz="4400" dirty="0"/>
+              </a:p>
+            </p:txBody>
+          </p:sp>
+        </mc:Choice>
+        <mc:Fallback>
+          <p:sp>
+            <p:nvSpPr>
+              <p:cNvPr id="30" name="TextBox 29">
+                <a:extLst>
+                  <a:ext uri="{FF2B5EF4-FFF2-40B4-BE49-F238E27FC236}">
+                    <a16:creationId xmlns:a16="http://schemas.microsoft.com/office/drawing/2014/main" id="{38481E46-0AD7-C5E0-693E-AAAAB47D0924}"/>
+                  </a:ext>
+                </a:extLst>
+              </p:cNvPr>
+              <p:cNvSpPr txBox="1">
+                <a:spLocks noRot="1" noChangeAspect="1" noMove="1" noResize="1" noEditPoints="1" noAdjustHandles="1" noChangeArrowheads="1" noChangeShapeType="1" noTextEdit="1"/>
+              </p:cNvSpPr>
+              <p:nvPr/>
+            </p:nvSpPr>
+            <p:spPr>
+              <a:xfrm>
+                <a:off x="3771706" y="2927448"/>
+                <a:ext cx="612668" cy="769441"/>
+              </a:xfrm>
+              <a:prstGeom prst="rect">
+                <a:avLst/>
+              </a:prstGeom>
+              <a:blipFill>
+                <a:blip r:embed="rId5"/>
+                <a:stretch>
+                  <a:fillRect/>
+                </a:stretch>
+              </a:blipFill>
+            </p:spPr>
+            <p:txBody>
+              <a:bodyPr/>
+              <a:lstStyle/>
+              <a:p>
+                <a:r>
+                  <a:rPr lang="en-US">
+                    <a:noFill/>
+                  </a:rPr>
+                  <a:t> </a:t>
+                </a:r>
+              </a:p>
+            </p:txBody>
+          </p:sp>
+        </mc:Fallback>
+      </mc:AlternateContent>
+      <mc:AlternateContent xmlns:mc="http://schemas.openxmlformats.org/markup-compatibility/2006">
+        <mc:Choice xmlns:a14="http://schemas.microsoft.com/office/drawing/2010/main" Requires="a14">
+          <p:sp>
+            <p:nvSpPr>
+              <p:cNvPr id="31" name="TextBox 30">
+                <a:extLst>
+                  <a:ext uri="{FF2B5EF4-FFF2-40B4-BE49-F238E27FC236}">
+                    <a16:creationId xmlns:a16="http://schemas.microsoft.com/office/drawing/2014/main" id="{A5B443BA-F264-A6E4-6F8C-F28EB3AC67AD}"/>
+                  </a:ext>
+                </a:extLst>
+              </p:cNvPr>
+              <p:cNvSpPr txBox="1"/>
+              <p:nvPr/>
+            </p:nvSpPr>
+            <p:spPr>
+              <a:xfrm>
+                <a:off x="3771706" y="5337273"/>
+                <a:ext cx="612668" cy="769441"/>
+              </a:xfrm>
+              <a:prstGeom prst="rect">
+                <a:avLst/>
+              </a:prstGeom>
+              <a:noFill/>
+            </p:spPr>
+            <p:txBody>
+              <a:bodyPr wrap="none" rtlCol="0">
+                <a:spAutoFit/>
+              </a:bodyPr>
+              <a:lstStyle/>
+              <a:p>
+                <a14:m>
+                  <m:oMathPara xmlns:m="http://schemas.openxmlformats.org/officeDocument/2006/math">
+                    <m:oMathParaPr>
+                      <m:jc m:val="centerGroup"/>
+                    </m:oMathParaPr>
+                    <m:oMath xmlns:m="http://schemas.openxmlformats.org/officeDocument/2006/math">
+                      <m:r>
+                        <a:rPr lang="en-US" sz="4400" b="0" i="1" smtClean="0">
+                          <a:latin typeface="Cambria Math" panose="02040503050406030204" pitchFamily="18" charset="0"/>
+                        </a:rPr>
+                        <m:t>6</m:t>
+                      </m:r>
+                    </m:oMath>
+                  </m:oMathPara>
+                </a14:m>
+                <a:endParaRPr lang="en-US" sz="4400" dirty="0"/>
+              </a:p>
+            </p:txBody>
+          </p:sp>
+        </mc:Choice>
+        <mc:Fallback>
+          <p:sp>
+            <p:nvSpPr>
+              <p:cNvPr id="31" name="TextBox 30">
+                <a:extLst>
+                  <a:ext uri="{FF2B5EF4-FFF2-40B4-BE49-F238E27FC236}">
+                    <a16:creationId xmlns:a16="http://schemas.microsoft.com/office/drawing/2014/main" id="{A5B443BA-F264-A6E4-6F8C-F28EB3AC67AD}"/>
+                  </a:ext>
+                </a:extLst>
+              </p:cNvPr>
+              <p:cNvSpPr txBox="1">
+                <a:spLocks noRot="1" noChangeAspect="1" noMove="1" noResize="1" noEditPoints="1" noAdjustHandles="1" noChangeArrowheads="1" noChangeShapeType="1" noTextEdit="1"/>
+              </p:cNvSpPr>
+              <p:nvPr/>
+            </p:nvSpPr>
+            <p:spPr>
+              <a:xfrm>
+                <a:off x="3771706" y="5337273"/>
+                <a:ext cx="612668" cy="769441"/>
+              </a:xfrm>
+              <a:prstGeom prst="rect">
+                <a:avLst/>
+              </a:prstGeom>
+              <a:blipFill>
+                <a:blip r:embed="rId6"/>
+                <a:stretch>
+                  <a:fillRect/>
+                </a:stretch>
+              </a:blipFill>
+            </p:spPr>
+            <p:txBody>
+              <a:bodyPr/>
+              <a:lstStyle/>
+              <a:p>
+                <a:r>
+                  <a:rPr lang="en-US">
+                    <a:noFill/>
+                  </a:rPr>
+                  <a:t> </a:t>
+                </a:r>
+              </a:p>
+            </p:txBody>
+          </p:sp>
+        </mc:Fallback>
+      </mc:AlternateContent>
+      <mc:AlternateContent xmlns:mc="http://schemas.openxmlformats.org/markup-compatibility/2006">
+        <mc:Choice xmlns:a14="http://schemas.microsoft.com/office/drawing/2010/main" Requires="a14">
+          <p:sp>
+            <p:nvSpPr>
+              <p:cNvPr id="32" name="TextBox 31">
+                <a:extLst>
+                  <a:ext uri="{FF2B5EF4-FFF2-40B4-BE49-F238E27FC236}">
+                    <a16:creationId xmlns:a16="http://schemas.microsoft.com/office/drawing/2014/main" id="{4E122B48-8C38-2077-B26C-5831A35CEEB5}"/>
+                  </a:ext>
+                </a:extLst>
+              </p:cNvPr>
+              <p:cNvSpPr txBox="1"/>
+              <p:nvPr/>
+            </p:nvSpPr>
+            <p:spPr>
+              <a:xfrm>
+                <a:off x="3466654" y="4132360"/>
+                <a:ext cx="611386" cy="769441"/>
+              </a:xfrm>
+              <a:prstGeom prst="rect">
+                <a:avLst/>
+              </a:prstGeom>
+              <a:noFill/>
+            </p:spPr>
+            <p:txBody>
+              <a:bodyPr wrap="none" rtlCol="0">
+                <a:spAutoFit/>
+              </a:bodyPr>
+              <a:lstStyle/>
+              <a:p>
+                <a14:m>
+                  <m:oMathPara xmlns:m="http://schemas.openxmlformats.org/officeDocument/2006/math">
+                    <m:oMathParaPr>
+                      <m:jc m:val="centerGroup"/>
+                    </m:oMathParaPr>
+                    <m:oMath xmlns:m="http://schemas.openxmlformats.org/officeDocument/2006/math">
+                      <m:r>
+                        <a:rPr lang="en-US" sz="4400" b="0" i="1" smtClean="0">
+                          <a:latin typeface="Cambria Math" panose="02040503050406030204" pitchFamily="18" charset="0"/>
+                        </a:rPr>
+                        <m:t>𝐿</m:t>
+                      </m:r>
+                    </m:oMath>
+                  </m:oMathPara>
+                </a14:m>
+                <a:endParaRPr lang="en-US" sz="4400" dirty="0"/>
+              </a:p>
+            </p:txBody>
+          </p:sp>
+        </mc:Choice>
+        <mc:Fallback>
+          <p:sp>
+            <p:nvSpPr>
+              <p:cNvPr id="32" name="TextBox 31">
+                <a:extLst>
+                  <a:ext uri="{FF2B5EF4-FFF2-40B4-BE49-F238E27FC236}">
+                    <a16:creationId xmlns:a16="http://schemas.microsoft.com/office/drawing/2014/main" id="{4E122B48-8C38-2077-B26C-5831A35CEEB5}"/>
+                  </a:ext>
+                </a:extLst>
+              </p:cNvPr>
+              <p:cNvSpPr txBox="1">
+                <a:spLocks noRot="1" noChangeAspect="1" noMove="1" noResize="1" noEditPoints="1" noAdjustHandles="1" noChangeArrowheads="1" noChangeShapeType="1" noTextEdit="1"/>
+              </p:cNvSpPr>
+              <p:nvPr/>
+            </p:nvSpPr>
+            <p:spPr>
+              <a:xfrm>
+                <a:off x="3466654" y="4132360"/>
+                <a:ext cx="611386" cy="769441"/>
+              </a:xfrm>
+              <a:prstGeom prst="rect">
+                <a:avLst/>
+              </a:prstGeom>
+              <a:blipFill>
+                <a:blip r:embed="rId7"/>
+                <a:stretch>
+                  <a:fillRect/>
+                </a:stretch>
+              </a:blipFill>
+            </p:spPr>
+            <p:txBody>
+              <a:bodyPr/>
+              <a:lstStyle/>
+              <a:p>
+                <a:r>
+                  <a:rPr lang="en-US">
+                    <a:noFill/>
+                  </a:rPr>
+                  <a:t> </a:t>
+                </a:r>
+              </a:p>
+            </p:txBody>
+          </p:sp>
+        </mc:Fallback>
+      </mc:AlternateContent>
+      <mc:AlternateContent xmlns:mc="http://schemas.openxmlformats.org/markup-compatibility/2006">
+        <mc:Choice xmlns:a14="http://schemas.microsoft.com/office/drawing/2010/main" Requires="a14">
+          <p:sp>
+            <p:nvSpPr>
+              <p:cNvPr id="33" name="TextBox 32">
+                <a:extLst>
+                  <a:ext uri="{FF2B5EF4-FFF2-40B4-BE49-F238E27FC236}">
+                    <a16:creationId xmlns:a16="http://schemas.microsoft.com/office/drawing/2014/main" id="{008960E8-BC1C-51BD-9FBF-917057A629AC}"/>
+                  </a:ext>
+                </a:extLst>
+              </p:cNvPr>
+              <p:cNvSpPr txBox="1"/>
+              <p:nvPr/>
+            </p:nvSpPr>
+            <p:spPr>
+              <a:xfrm>
+                <a:off x="6205909" y="1069479"/>
+                <a:ext cx="970650" cy="769441"/>
+              </a:xfrm>
+              <a:prstGeom prst="rect">
+                <a:avLst/>
+              </a:prstGeom>
+              <a:noFill/>
+            </p:spPr>
+            <p:txBody>
+              <a:bodyPr wrap="none" rtlCol="0">
+                <a:spAutoFit/>
+              </a:bodyPr>
+              <a:lstStyle/>
+              <a:p>
+                <a14:m>
+                  <m:oMathPara xmlns:m="http://schemas.openxmlformats.org/officeDocument/2006/math">
+                    <m:oMathParaPr>
+                      <m:jc m:val="centerGroup"/>
+                    </m:oMathParaPr>
+                    <m:oMath xmlns:m="http://schemas.openxmlformats.org/officeDocument/2006/math">
+                      <m:r>
+                        <m:rPr>
+                          <m:sty m:val="p"/>
+                        </m:rPr>
+                        <a:rPr lang="en-US" sz="4400" b="0" i="0" smtClean="0">
+                          <a:latin typeface="Cambria Math" panose="02040503050406030204" pitchFamily="18" charset="0"/>
+                        </a:rPr>
+                        <m:t>Δ</m:t>
+                      </m:r>
+                      <m:r>
+                        <a:rPr lang="en-US" sz="4400" b="0" i="1" smtClean="0">
+                          <a:latin typeface="Cambria Math" panose="02040503050406030204" pitchFamily="18" charset="0"/>
+                        </a:rPr>
+                        <m:t>𝜃</m:t>
+                      </m:r>
+                    </m:oMath>
+                  </m:oMathPara>
+                </a14:m>
+                <a:endParaRPr lang="en-US" sz="4400" dirty="0"/>
+              </a:p>
+            </p:txBody>
+          </p:sp>
+        </mc:Choice>
+        <mc:Fallback>
+          <p:sp>
+            <p:nvSpPr>
+              <p:cNvPr id="33" name="TextBox 32">
+                <a:extLst>
+                  <a:ext uri="{FF2B5EF4-FFF2-40B4-BE49-F238E27FC236}">
+                    <a16:creationId xmlns:a16="http://schemas.microsoft.com/office/drawing/2014/main" id="{008960E8-BC1C-51BD-9FBF-917057A629AC}"/>
+                  </a:ext>
+                </a:extLst>
+              </p:cNvPr>
+              <p:cNvSpPr txBox="1">
+                <a:spLocks noRot="1" noChangeAspect="1" noMove="1" noResize="1" noEditPoints="1" noAdjustHandles="1" noChangeArrowheads="1" noChangeShapeType="1" noTextEdit="1"/>
+              </p:cNvSpPr>
+              <p:nvPr/>
+            </p:nvSpPr>
+            <p:spPr>
+              <a:xfrm>
+                <a:off x="6205909" y="1069479"/>
+                <a:ext cx="970650" cy="769441"/>
+              </a:xfrm>
+              <a:prstGeom prst="rect">
+                <a:avLst/>
+              </a:prstGeom>
+              <a:blipFill>
+                <a:blip r:embed="rId8"/>
+                <a:stretch>
+                  <a:fillRect/>
+                </a:stretch>
+              </a:blipFill>
+            </p:spPr>
+            <p:txBody>
+              <a:bodyPr/>
+              <a:lstStyle/>
+              <a:p>
+                <a:r>
+                  <a:rPr lang="en-US">
+                    <a:noFill/>
+                  </a:rPr>
+                  <a:t> </a:t>
+                </a:r>
+              </a:p>
+            </p:txBody>
+          </p:sp>
+        </mc:Fallback>
+      </mc:AlternateContent>
     </p:spTree>
     <p:extLst>
       <p:ext uri="{BB962C8B-B14F-4D97-AF65-F5344CB8AC3E}">

--- a/figures/mosaic/Presentation1.pptx
+++ b/figures/mosaic/Presentation1.pptx
@@ -126,12 +126,12 @@
   <pc:docChgLst>
     <pc:chgData name="David Beckwitt" userId="bdca50846bee3b35" providerId="LiveId" clId="{77C57F99-3B40-463A-9855-34DA2A8048A2}"/>
     <pc:docChg chg="undo custSel addSld delSld modSld">
-      <pc:chgData name="David Beckwitt" userId="bdca50846bee3b35" providerId="LiveId" clId="{77C57F99-3B40-463A-9855-34DA2A8048A2}" dt="2026-05-22T22:50:02.241" v="446" actId="20577"/>
+      <pc:chgData name="David Beckwitt" userId="bdca50846bee3b35" providerId="LiveId" clId="{77C57F99-3B40-463A-9855-34DA2A8048A2}" dt="2026-05-27T00:15:58.026" v="484" actId="1076"/>
       <pc:docMkLst>
         <pc:docMk/>
       </pc:docMkLst>
       <pc:sldChg chg="addSp delSp modSp mod">
-        <pc:chgData name="David Beckwitt" userId="bdca50846bee3b35" providerId="LiveId" clId="{77C57F99-3B40-463A-9855-34DA2A8048A2}" dt="2026-05-22T17:03:44.486" v="189" actId="1076"/>
+        <pc:chgData name="David Beckwitt" userId="bdca50846bee3b35" providerId="LiveId" clId="{77C57F99-3B40-463A-9855-34DA2A8048A2}" dt="2026-05-27T00:15:58.026" v="484" actId="1076"/>
         <pc:sldMkLst>
           <pc:docMk/>
           <pc:sldMk cId="193401497" sldId="256"/>
@@ -193,7 +193,7 @@
           </ac:spMkLst>
         </pc:spChg>
         <pc:spChg chg="add mod">
-          <ac:chgData name="David Beckwitt" userId="bdca50846bee3b35" providerId="LiveId" clId="{77C57F99-3B40-463A-9855-34DA2A8048A2}" dt="2026-05-22T17:03:21.666" v="163" actId="1076"/>
+          <ac:chgData name="David Beckwitt" userId="bdca50846bee3b35" providerId="LiveId" clId="{77C57F99-3B40-463A-9855-34DA2A8048A2}" dt="2026-05-27T00:15:58.026" v="484" actId="1076"/>
           <ac:spMkLst>
             <pc:docMk/>
             <pc:sldMk cId="193401497" sldId="256"/>
@@ -208,12 +208,20 @@
             <ac:spMk id="23" creationId="{98391F30-547F-6A10-AAE6-EFF435098E15}"/>
           </ac:spMkLst>
         </pc:spChg>
-        <pc:picChg chg="add mod">
-          <ac:chgData name="David Beckwitt" userId="bdca50846bee3b35" providerId="LiveId" clId="{77C57F99-3B40-463A-9855-34DA2A8048A2}" dt="2026-05-22T17:00:43.127" v="8" actId="1076"/>
+        <pc:picChg chg="add del mod">
+          <ac:chgData name="David Beckwitt" userId="bdca50846bee3b35" providerId="LiveId" clId="{77C57F99-3B40-463A-9855-34DA2A8048A2}" dt="2026-05-27T00:15:39.904" v="447" actId="478"/>
           <ac:picMkLst>
             <pc:docMk/>
             <pc:sldMk cId="193401497" sldId="256"/>
             <ac:picMk id="4" creationId="{0339FB3F-3274-698B-10CD-7A7DDFD015E1}"/>
+          </ac:picMkLst>
+        </pc:picChg>
+        <pc:picChg chg="add mod ord">
+          <ac:chgData name="David Beckwitt" userId="bdca50846bee3b35" providerId="LiveId" clId="{77C57F99-3B40-463A-9855-34DA2A8048A2}" dt="2026-05-27T00:15:49.117" v="482" actId="1076"/>
+          <ac:picMkLst>
+            <pc:docMk/>
+            <pc:sldMk cId="193401497" sldId="256"/>
+            <ac:picMk id="5" creationId="{CD322D84-E843-0E4C-3797-7B0F360A7AD0}"/>
           </ac:picMkLst>
         </pc:picChg>
         <pc:picChg chg="mod">
@@ -233,7 +241,7 @@
           </ac:cxnSpMkLst>
         </pc:cxnChg>
         <pc:cxnChg chg="add mod">
-          <ac:chgData name="David Beckwitt" userId="bdca50846bee3b35" providerId="LiveId" clId="{77C57F99-3B40-463A-9855-34DA2A8048A2}" dt="2026-05-22T17:01:03.015" v="11" actId="693"/>
+          <ac:chgData name="David Beckwitt" userId="bdca50846bee3b35" providerId="LiveId" clId="{77C57F99-3B40-463A-9855-34DA2A8048A2}" dt="2026-05-27T00:15:54.305" v="483" actId="1076"/>
           <ac:cxnSpMkLst>
             <pc:docMk/>
             <pc:sldMk cId="193401497" sldId="256"/>
@@ -264,14 +272,6 @@
             <ac:cxnSpMk id="15" creationId="{4540F94B-4F20-8F72-5F74-7971143BF542}"/>
           </ac:cxnSpMkLst>
         </pc:cxnChg>
-        <pc:cxnChg chg="add del mod">
-          <ac:chgData name="David Beckwitt" userId="bdca50846bee3b35" providerId="LiveId" clId="{77C57F99-3B40-463A-9855-34DA2A8048A2}" dt="2026-05-22T17:01:18.458" v="14" actId="478"/>
-          <ac:cxnSpMkLst>
-            <pc:docMk/>
-            <pc:sldMk cId="193401497" sldId="256"/>
-            <ac:cxnSpMk id="16" creationId="{3A861791-9013-E7BD-C886-CC8821747D65}"/>
-          </ac:cxnSpMkLst>
-        </pc:cxnChg>
         <pc:cxnChg chg="add mod">
           <ac:chgData name="David Beckwitt" userId="bdca50846bee3b35" providerId="LiveId" clId="{77C57F99-3B40-463A-9855-34DA2A8048A2}" dt="2026-05-22T17:01:33.186" v="19" actId="1076"/>
           <ac:cxnSpMkLst>
@@ -287,62 +287,6 @@
           <pc:docMk/>
           <pc:sldMk cId="1480126713" sldId="257"/>
         </pc:sldMkLst>
-        <pc:spChg chg="del">
-          <ac:chgData name="David Beckwitt" userId="bdca50846bee3b35" providerId="LiveId" clId="{77C57F99-3B40-463A-9855-34DA2A8048A2}" dt="2026-05-21T16:09:20.710" v="1" actId="478"/>
-          <ac:spMkLst>
-            <pc:docMk/>
-            <pc:sldMk cId="1480126713" sldId="257"/>
-            <ac:spMk id="2" creationId="{65910E3C-8BCA-0050-0864-1BAD3B2B3AC6}"/>
-          </ac:spMkLst>
-        </pc:spChg>
-        <pc:spChg chg="del">
-          <ac:chgData name="David Beckwitt" userId="bdca50846bee3b35" providerId="LiveId" clId="{77C57F99-3B40-463A-9855-34DA2A8048A2}" dt="2026-05-21T16:09:20.710" v="1" actId="478"/>
-          <ac:spMkLst>
-            <pc:docMk/>
-            <pc:sldMk cId="1480126713" sldId="257"/>
-            <ac:spMk id="3" creationId="{7EC09764-BDA1-84B6-EBF8-D6B1A930C8E7}"/>
-          </ac:spMkLst>
-        </pc:spChg>
-        <pc:spChg chg="add del mod">
-          <ac:chgData name="David Beckwitt" userId="bdca50846bee3b35" providerId="LiveId" clId="{77C57F99-3B40-463A-9855-34DA2A8048A2}" dt="2026-05-22T22:49:23.686" v="409" actId="478"/>
-          <ac:spMkLst>
-            <pc:docMk/>
-            <pc:sldMk cId="1480126713" sldId="257"/>
-            <ac:spMk id="14" creationId="{CCB66581-C166-D088-0546-37F7F022E1CD}"/>
-          </ac:spMkLst>
-        </pc:spChg>
-        <pc:spChg chg="add del">
-          <ac:chgData name="David Beckwitt" userId="bdca50846bee3b35" providerId="LiveId" clId="{77C57F99-3B40-463A-9855-34DA2A8048A2}" dt="2026-05-22T22:47:43.188" v="339" actId="22"/>
-          <ac:spMkLst>
-            <pc:docMk/>
-            <pc:sldMk cId="1480126713" sldId="257"/>
-            <ac:spMk id="18" creationId="{6B389BF2-F5BD-076B-17C3-F03487D36057}"/>
-          </ac:spMkLst>
-        </pc:spChg>
-        <pc:spChg chg="add del mod">
-          <ac:chgData name="David Beckwitt" userId="bdca50846bee3b35" providerId="LiveId" clId="{77C57F99-3B40-463A-9855-34DA2A8048A2}" dt="2026-05-22T22:49:22.484" v="408" actId="478"/>
-          <ac:spMkLst>
-            <pc:docMk/>
-            <pc:sldMk cId="1480126713" sldId="257"/>
-            <ac:spMk id="19" creationId="{E088FB6F-5242-186B-BCFA-E83FFFA2365B}"/>
-          </ac:spMkLst>
-        </pc:spChg>
-        <pc:spChg chg="add mod">
-          <ac:chgData name="David Beckwitt" userId="bdca50846bee3b35" providerId="LiveId" clId="{77C57F99-3B40-463A-9855-34DA2A8048A2}" dt="2026-05-22T22:48:12.578" v="355" actId="1076"/>
-          <ac:spMkLst>
-            <pc:docMk/>
-            <pc:sldMk cId="1480126713" sldId="257"/>
-            <ac:spMk id="25" creationId="{221D1D13-E96D-C72D-DEE8-E99DC82C8CE8}"/>
-          </ac:spMkLst>
-        </pc:spChg>
-        <pc:spChg chg="add del mod">
-          <ac:chgData name="David Beckwitt" userId="bdca50846bee3b35" providerId="LiveId" clId="{77C57F99-3B40-463A-9855-34DA2A8048A2}" dt="2026-05-22T22:49:14.538" v="402" actId="478"/>
-          <ac:spMkLst>
-            <pc:docMk/>
-            <pc:sldMk cId="1480126713" sldId="257"/>
-            <ac:spMk id="27" creationId="{3C886DC9-66B5-7C61-E5F9-57992792D4D7}"/>
-          </ac:spMkLst>
-        </pc:spChg>
         <pc:spChg chg="add mod">
           <ac:chgData name="David Beckwitt" userId="bdca50846bee3b35" providerId="LiveId" clId="{77C57F99-3B40-463A-9855-34DA2A8048A2}" dt="2026-05-22T22:49:12.421" v="401" actId="1076"/>
           <ac:spMkLst>
@@ -391,30 +335,6 @@
             <ac:spMk id="33" creationId="{008960E8-BC1C-51BD-9FBF-917057A629AC}"/>
           </ac:spMkLst>
         </pc:spChg>
-        <pc:picChg chg="add del mod">
-          <ac:chgData name="David Beckwitt" userId="bdca50846bee3b35" providerId="LiveId" clId="{77C57F99-3B40-463A-9855-34DA2A8048A2}" dt="2026-05-22T22:46:37.470" v="317" actId="478"/>
-          <ac:picMkLst>
-            <pc:docMk/>
-            <pc:sldMk cId="1480126713" sldId="257"/>
-            <ac:picMk id="3" creationId="{FA3E60ED-0DA0-7132-6A0A-03970DE9FFD5}"/>
-          </ac:picMkLst>
-        </pc:picChg>
-        <pc:picChg chg="add del mod modCrop">
-          <ac:chgData name="David Beckwitt" userId="bdca50846bee3b35" providerId="LiveId" clId="{77C57F99-3B40-463A-9855-34DA2A8048A2}" dt="2026-05-22T22:46:52.762" v="321" actId="478"/>
-          <ac:picMkLst>
-            <pc:docMk/>
-            <pc:sldMk cId="1480126713" sldId="257"/>
-            <ac:picMk id="4" creationId="{ED0DE8E9-AA3F-172D-C67C-B5C93E806052}"/>
-          </ac:picMkLst>
-        </pc:picChg>
-        <pc:picChg chg="add del mod">
-          <ac:chgData name="David Beckwitt" userId="bdca50846bee3b35" providerId="LiveId" clId="{77C57F99-3B40-463A-9855-34DA2A8048A2}" dt="2026-05-21T16:12:32.570" v="4" actId="478"/>
-          <ac:picMkLst>
-            <pc:docMk/>
-            <pc:sldMk cId="1480126713" sldId="257"/>
-            <ac:picMk id="5" creationId="{AD857C23-0465-5343-2967-DC572475048A}"/>
-          </ac:picMkLst>
-        </pc:picChg>
         <pc:picChg chg="add mod">
           <ac:chgData name="David Beckwitt" userId="bdca50846bee3b35" providerId="LiveId" clId="{77C57F99-3B40-463A-9855-34DA2A8048A2}" dt="2026-05-22T22:49:37.895" v="419" actId="1076"/>
           <ac:picMkLst>
@@ -423,133 +343,6 @@
             <ac:picMk id="12" creationId="{9BD51110-7771-1C32-9094-88FA9E8CE1EA}"/>
           </ac:picMkLst>
         </pc:picChg>
-        <pc:cxnChg chg="add mod">
-          <ac:chgData name="David Beckwitt" userId="bdca50846bee3b35" providerId="LiveId" clId="{77C57F99-3B40-463A-9855-34DA2A8048A2}" dt="2026-05-22T17:09:23.846" v="297" actId="693"/>
-          <ac:cxnSpMkLst>
-            <pc:docMk/>
-            <pc:sldMk cId="1480126713" sldId="257"/>
-            <ac:cxnSpMk id="5" creationId="{123316F3-25BB-254A-094B-0248AEDA554A}"/>
-          </ac:cxnSpMkLst>
-        </pc:cxnChg>
-        <pc:cxnChg chg="add del mod">
-          <ac:chgData name="David Beckwitt" userId="bdca50846bee3b35" providerId="LiveId" clId="{77C57F99-3B40-463A-9855-34DA2A8048A2}" dt="2026-05-22T22:46:37.470" v="317" actId="478"/>
-          <ac:cxnSpMkLst>
-            <pc:docMk/>
-            <pc:sldMk cId="1480126713" sldId="257"/>
-            <ac:cxnSpMk id="6" creationId="{4F40CFE6-98EA-1925-7900-CCAA0C1B93B2}"/>
-          </ac:cxnSpMkLst>
-        </pc:cxnChg>
-        <pc:cxnChg chg="add mod">
-          <ac:chgData name="David Beckwitt" userId="bdca50846bee3b35" providerId="LiveId" clId="{77C57F99-3B40-463A-9855-34DA2A8048A2}" dt="2026-05-22T17:09:23.846" v="297" actId="693"/>
-          <ac:cxnSpMkLst>
-            <pc:docMk/>
-            <pc:sldMk cId="1480126713" sldId="257"/>
-            <ac:cxnSpMk id="7" creationId="{856EFE5B-777A-4D52-29DC-A969C917C479}"/>
-          </ac:cxnSpMkLst>
-        </pc:cxnChg>
-        <pc:cxnChg chg="add del mod">
-          <ac:chgData name="David Beckwitt" userId="bdca50846bee3b35" providerId="LiveId" clId="{77C57F99-3B40-463A-9855-34DA2A8048A2}" dt="2026-05-22T22:46:37.470" v="317" actId="478"/>
-          <ac:cxnSpMkLst>
-            <pc:docMk/>
-            <pc:sldMk cId="1480126713" sldId="257"/>
-            <ac:cxnSpMk id="8" creationId="{82D65512-12D5-343F-6715-9B5CF849DA76}"/>
-          </ac:cxnSpMkLst>
-        </pc:cxnChg>
-        <pc:cxnChg chg="add del mod">
-          <ac:chgData name="David Beckwitt" userId="bdca50846bee3b35" providerId="LiveId" clId="{77C57F99-3B40-463A-9855-34DA2A8048A2}" dt="2026-05-22T22:46:37.470" v="317" actId="478"/>
-          <ac:cxnSpMkLst>
-            <pc:docMk/>
-            <pc:sldMk cId="1480126713" sldId="257"/>
-            <ac:cxnSpMk id="10" creationId="{184D6841-3F37-2B8A-C3DB-873E2C4199E4}"/>
-          </ac:cxnSpMkLst>
-        </pc:cxnChg>
-        <pc:cxnChg chg="add mod">
-          <ac:chgData name="David Beckwitt" userId="bdca50846bee3b35" providerId="LiveId" clId="{77C57F99-3B40-463A-9855-34DA2A8048A2}" dt="2026-05-22T17:07:22.097" v="215" actId="1035"/>
-          <ac:cxnSpMkLst>
-            <pc:docMk/>
-            <pc:sldMk cId="1480126713" sldId="257"/>
-            <ac:cxnSpMk id="11" creationId="{46B167F0-DEBC-CA65-9130-27538F452A9D}"/>
-          </ac:cxnSpMkLst>
-        </pc:cxnChg>
-        <pc:cxnChg chg="add del mod">
-          <ac:chgData name="David Beckwitt" userId="bdca50846bee3b35" providerId="LiveId" clId="{77C57F99-3B40-463A-9855-34DA2A8048A2}" dt="2026-05-22T22:46:37.470" v="317" actId="478"/>
-          <ac:cxnSpMkLst>
-            <pc:docMk/>
-            <pc:sldMk cId="1480126713" sldId="257"/>
-            <ac:cxnSpMk id="13" creationId="{872899B0-D4C3-B788-274A-0D6D6FF92E8C}"/>
-          </ac:cxnSpMkLst>
-        </pc:cxnChg>
-        <pc:cxnChg chg="add del mod">
-          <ac:chgData name="David Beckwitt" userId="bdca50846bee3b35" providerId="LiveId" clId="{77C57F99-3B40-463A-9855-34DA2A8048A2}" dt="2026-05-22T22:46:37.470" v="317" actId="478"/>
-          <ac:cxnSpMkLst>
-            <pc:docMk/>
-            <pc:sldMk cId="1480126713" sldId="257"/>
-            <ac:cxnSpMk id="15" creationId="{C91BCE6C-A3C6-848C-A969-AE32BE330A39}"/>
-          </ac:cxnSpMkLst>
-        </pc:cxnChg>
-        <pc:cxnChg chg="add del mod">
-          <ac:chgData name="David Beckwitt" userId="bdca50846bee3b35" providerId="LiveId" clId="{77C57F99-3B40-463A-9855-34DA2A8048A2}" dt="2026-05-22T22:46:37.470" v="317" actId="478"/>
-          <ac:cxnSpMkLst>
-            <pc:docMk/>
-            <pc:sldMk cId="1480126713" sldId="257"/>
-            <ac:cxnSpMk id="17" creationId="{ACC85DB0-F8D0-896F-4785-2843E00F102B}"/>
-          </ac:cxnSpMkLst>
-        </pc:cxnChg>
-        <pc:cxnChg chg="add del mod">
-          <ac:chgData name="David Beckwitt" userId="bdca50846bee3b35" providerId="LiveId" clId="{77C57F99-3B40-463A-9855-34DA2A8048A2}" dt="2026-05-22T22:46:37.470" v="317" actId="478"/>
-          <ac:cxnSpMkLst>
-            <pc:docMk/>
-            <pc:sldMk cId="1480126713" sldId="257"/>
-            <ac:cxnSpMk id="20" creationId="{E023FB43-DF49-4607-A9E1-809EF8F5A87E}"/>
-          </ac:cxnSpMkLst>
-        </pc:cxnChg>
-        <pc:cxnChg chg="add mod">
-          <ac:chgData name="David Beckwitt" userId="bdca50846bee3b35" providerId="LiveId" clId="{77C57F99-3B40-463A-9855-34DA2A8048A2}" dt="2026-05-22T17:09:05.149" v="294" actId="693"/>
-          <ac:cxnSpMkLst>
-            <pc:docMk/>
-            <pc:sldMk cId="1480126713" sldId="257"/>
-            <ac:cxnSpMk id="21" creationId="{0CFFC1C2-F07F-FE0E-A07E-0C67D111BDEE}"/>
-          </ac:cxnSpMkLst>
-        </pc:cxnChg>
-        <pc:cxnChg chg="add mod">
-          <ac:chgData name="David Beckwitt" userId="bdca50846bee3b35" providerId="LiveId" clId="{77C57F99-3B40-463A-9855-34DA2A8048A2}" dt="2026-05-22T17:09:05.149" v="294" actId="693"/>
-          <ac:cxnSpMkLst>
-            <pc:docMk/>
-            <pc:sldMk cId="1480126713" sldId="257"/>
-            <ac:cxnSpMk id="22" creationId="{A24B4914-E2F2-A401-D9EE-27A3036B8CC8}"/>
-          </ac:cxnSpMkLst>
-        </pc:cxnChg>
-        <pc:cxnChg chg="add del mod">
-          <ac:chgData name="David Beckwitt" userId="bdca50846bee3b35" providerId="LiveId" clId="{77C57F99-3B40-463A-9855-34DA2A8048A2}" dt="2026-05-22T22:46:37.470" v="317" actId="478"/>
-          <ac:cxnSpMkLst>
-            <pc:docMk/>
-            <pc:sldMk cId="1480126713" sldId="257"/>
-            <ac:cxnSpMk id="23" creationId="{5A5C705B-CEF2-1E00-787D-F5A7DB080AE6}"/>
-          </ac:cxnSpMkLst>
-        </pc:cxnChg>
-        <pc:cxnChg chg="add mod">
-          <ac:chgData name="David Beckwitt" userId="bdca50846bee3b35" providerId="LiveId" clId="{77C57F99-3B40-463A-9855-34DA2A8048A2}" dt="2026-05-22T17:09:05.149" v="294" actId="693"/>
-          <ac:cxnSpMkLst>
-            <pc:docMk/>
-            <pc:sldMk cId="1480126713" sldId="257"/>
-            <ac:cxnSpMk id="24" creationId="{BBBD510A-E1B2-27D5-FADE-AFE6E07526BE}"/>
-          </ac:cxnSpMkLst>
-        </pc:cxnChg>
-        <pc:cxnChg chg="add del mod">
-          <ac:chgData name="David Beckwitt" userId="bdca50846bee3b35" providerId="LiveId" clId="{77C57F99-3B40-463A-9855-34DA2A8048A2}" dt="2026-05-22T22:46:37.470" v="317" actId="478"/>
-          <ac:cxnSpMkLst>
-            <pc:docMk/>
-            <pc:sldMk cId="1480126713" sldId="257"/>
-            <ac:cxnSpMk id="26" creationId="{80E18C60-09C0-6779-3E47-3DCAB8275251}"/>
-          </ac:cxnSpMkLst>
-        </pc:cxnChg>
-      </pc:sldChg>
-      <pc:sldChg chg="new del">
-        <pc:chgData name="David Beckwitt" userId="bdca50846bee3b35" providerId="LiveId" clId="{77C57F99-3B40-463A-9855-34DA2A8048A2}" dt="2026-05-22T17:03:33.446" v="179" actId="47"/>
-        <pc:sldMkLst>
-          <pc:docMk/>
-          <pc:sldMk cId="1502120602" sldId="258"/>
-        </pc:sldMkLst>
       </pc:sldChg>
     </pc:docChg>
   </pc:docChgLst>
@@ -703,7 +496,7 @@
           <a:p>
             <a:fld id="{A4AAC1D5-CE9F-46E2-B0D3-6285187F5442}" type="datetimeFigureOut">
               <a:rPr lang="en-US" smtClean="0"/>
-              <a:t>5/22/2026</a:t>
+              <a:t>5/26/2026</a:t>
             </a:fld>
             <a:endParaRPr lang="en-US"/>
           </a:p>
@@ -901,7 +694,7 @@
           <a:p>
             <a:fld id="{A4AAC1D5-CE9F-46E2-B0D3-6285187F5442}" type="datetimeFigureOut">
               <a:rPr lang="en-US" smtClean="0"/>
-              <a:t>5/22/2026</a:t>
+              <a:t>5/26/2026</a:t>
             </a:fld>
             <a:endParaRPr lang="en-US"/>
           </a:p>
@@ -1109,7 +902,7 @@
           <a:p>
             <a:fld id="{A4AAC1D5-CE9F-46E2-B0D3-6285187F5442}" type="datetimeFigureOut">
               <a:rPr lang="en-US" smtClean="0"/>
-              <a:t>5/22/2026</a:t>
+              <a:t>5/26/2026</a:t>
             </a:fld>
             <a:endParaRPr lang="en-US"/>
           </a:p>
@@ -1307,7 +1100,7 @@
           <a:p>
             <a:fld id="{A4AAC1D5-CE9F-46E2-B0D3-6285187F5442}" type="datetimeFigureOut">
               <a:rPr lang="en-US" smtClean="0"/>
-              <a:t>5/22/2026</a:t>
+              <a:t>5/26/2026</a:t>
             </a:fld>
             <a:endParaRPr lang="en-US"/>
           </a:p>
@@ -1582,7 +1375,7 @@
           <a:p>
             <a:fld id="{A4AAC1D5-CE9F-46E2-B0D3-6285187F5442}" type="datetimeFigureOut">
               <a:rPr lang="en-US" smtClean="0"/>
-              <a:t>5/22/2026</a:t>
+              <a:t>5/26/2026</a:t>
             </a:fld>
             <a:endParaRPr lang="en-US"/>
           </a:p>
@@ -1847,7 +1640,7 @@
           <a:p>
             <a:fld id="{A4AAC1D5-CE9F-46E2-B0D3-6285187F5442}" type="datetimeFigureOut">
               <a:rPr lang="en-US" smtClean="0"/>
-              <a:t>5/22/2026</a:t>
+              <a:t>5/26/2026</a:t>
             </a:fld>
             <a:endParaRPr lang="en-US"/>
           </a:p>
@@ -2259,7 +2052,7 @@
           <a:p>
             <a:fld id="{A4AAC1D5-CE9F-46E2-B0D3-6285187F5442}" type="datetimeFigureOut">
               <a:rPr lang="en-US" smtClean="0"/>
-              <a:t>5/22/2026</a:t>
+              <a:t>5/26/2026</a:t>
             </a:fld>
             <a:endParaRPr lang="en-US"/>
           </a:p>
@@ -2400,7 +2193,7 @@
           <a:p>
             <a:fld id="{A4AAC1D5-CE9F-46E2-B0D3-6285187F5442}" type="datetimeFigureOut">
               <a:rPr lang="en-US" smtClean="0"/>
-              <a:t>5/22/2026</a:t>
+              <a:t>5/26/2026</a:t>
             </a:fld>
             <a:endParaRPr lang="en-US"/>
           </a:p>
@@ -2513,7 +2306,7 @@
           <a:p>
             <a:fld id="{A4AAC1D5-CE9F-46E2-B0D3-6285187F5442}" type="datetimeFigureOut">
               <a:rPr lang="en-US" smtClean="0"/>
-              <a:t>5/22/2026</a:t>
+              <a:t>5/26/2026</a:t>
             </a:fld>
             <a:endParaRPr lang="en-US"/>
           </a:p>
@@ -2824,7 +2617,7 @@
           <a:p>
             <a:fld id="{A4AAC1D5-CE9F-46E2-B0D3-6285187F5442}" type="datetimeFigureOut">
               <a:rPr lang="en-US" smtClean="0"/>
-              <a:t>5/22/2026</a:t>
+              <a:t>5/26/2026</a:t>
             </a:fld>
             <a:endParaRPr lang="en-US"/>
           </a:p>
@@ -3112,7 +2905,7 @@
           <a:p>
             <a:fld id="{A4AAC1D5-CE9F-46E2-B0D3-6285187F5442}" type="datetimeFigureOut">
               <a:rPr lang="en-US" smtClean="0"/>
-              <a:t>5/22/2026</a:t>
+              <a:t>5/26/2026</a:t>
             </a:fld>
             <a:endParaRPr lang="en-US"/>
           </a:p>
@@ -3353,7 +3146,7 @@
           <a:p>
             <a:fld id="{A4AAC1D5-CE9F-46E2-B0D3-6285187F5442}" type="datetimeFigureOut">
               <a:rPr lang="en-US" smtClean="0"/>
-              <a:t>5/22/2026</a:t>
+              <a:t>5/26/2026</a:t>
             </a:fld>
             <a:endParaRPr lang="en-US"/>
           </a:p>
@@ -3772,10 +3565,10 @@
       </p:grpSpPr>
       <p:pic>
         <p:nvPicPr>
-          <p:cNvPr id="7" name="Picture 6">
-            <a:extLst>
-              <a:ext uri="{FF2B5EF4-FFF2-40B4-BE49-F238E27FC236}">
-                <a16:creationId xmlns:a16="http://schemas.microsoft.com/office/drawing/2014/main" id="{3CC1235A-5E43-89F5-6F72-B3A24CDF848D}"/>
+          <p:cNvPr id="5" name="Picture 4">
+            <a:extLst>
+              <a:ext uri="{FF2B5EF4-FFF2-40B4-BE49-F238E27FC236}">
+                <a16:creationId xmlns:a16="http://schemas.microsoft.com/office/drawing/2014/main" id="{CD322D84-E843-0E4C-3797-7B0F360A7AD0}"/>
               </a:ext>
             </a:extLst>
           </p:cNvPr>
@@ -3785,7 +3578,37 @@
           <p:nvPr/>
         </p:nvPicPr>
         <p:blipFill>
-          <a:blip r:embed="rId2">
+          <a:blip r:embed="rId2"/>
+          <a:stretch>
+            <a:fillRect/>
+          </a:stretch>
+        </p:blipFill>
+        <p:spPr>
+          <a:xfrm>
+            <a:off x="6830454" y="1417476"/>
+            <a:ext cx="3620005" cy="3410426"/>
+          </a:xfrm>
+          <a:prstGeom prst="rect">
+            <a:avLst/>
+          </a:prstGeom>
+        </p:spPr>
+      </p:pic>
+      <p:pic>
+        <p:nvPicPr>
+          <p:cNvPr id="7" name="Picture 6">
+            <a:extLst>
+              <a:ext uri="{FF2B5EF4-FFF2-40B4-BE49-F238E27FC236}">
+                <a16:creationId xmlns:a16="http://schemas.microsoft.com/office/drawing/2014/main" id="{3CC1235A-5E43-89F5-6F72-B3A24CDF848D}"/>
+              </a:ext>
+            </a:extLst>
+          </p:cNvPr>
+          <p:cNvPicPr>
+            <a:picLocks noChangeAspect="1"/>
+          </p:cNvPicPr>
+          <p:nvPr/>
+        </p:nvPicPr>
+        <p:blipFill>
+          <a:blip r:embed="rId3">
             <a:extLst>
               <a:ext uri="{28A0092B-C50C-407E-A947-70E740481C1C}">
                 <a14:useLocalDpi xmlns:a14="http://schemas.microsoft.com/office/drawing/2010/main" val="0"/>
@@ -4175,7 +3998,7 @@
                 <a:avLst/>
               </a:prstGeom>
               <a:blipFill>
-                <a:blip r:embed="rId3"/>
+                <a:blip r:embed="rId4"/>
                 <a:stretch>
                   <a:fillRect/>
                 </a:stretch>
@@ -4303,7 +4126,7 @@
                 <a:avLst/>
               </a:prstGeom>
               <a:blipFill>
-                <a:blip r:embed="rId4"/>
+                <a:blip r:embed="rId5"/>
                 <a:stretch>
                   <a:fillRect/>
                 </a:stretch>
@@ -4365,42 +4188,6 @@
           </a:fontRef>
         </p:style>
       </p:cxnSp>
-      <p:pic>
-        <p:nvPicPr>
-          <p:cNvPr id="4" name="Picture 3">
-            <a:extLst>
-              <a:ext uri="{FF2B5EF4-FFF2-40B4-BE49-F238E27FC236}">
-                <a16:creationId xmlns:a16="http://schemas.microsoft.com/office/drawing/2014/main" id="{0339FB3F-3274-698B-10CD-7A7DDFD015E1}"/>
-              </a:ext>
-            </a:extLst>
-          </p:cNvPr>
-          <p:cNvPicPr>
-            <a:picLocks noChangeAspect="1"/>
-          </p:cNvPicPr>
-          <p:nvPr/>
-        </p:nvPicPr>
-        <p:blipFill>
-          <a:blip r:embed="rId5">
-            <a:extLst>
-              <a:ext uri="{28A0092B-C50C-407E-A947-70E740481C1C}">
-                <a14:useLocalDpi xmlns:a14="http://schemas.microsoft.com/office/drawing/2010/main" val="0"/>
-              </a:ext>
-            </a:extLst>
-          </a:blip>
-          <a:stretch>
-            <a:fillRect/>
-          </a:stretch>
-        </p:blipFill>
-        <p:spPr>
-          <a:xfrm>
-            <a:off x="6687675" y="1076215"/>
-            <a:ext cx="4391638" cy="4153480"/>
-          </a:xfrm>
-          <a:prstGeom prst="rect">
-            <a:avLst/>
-          </a:prstGeom>
-        </p:spPr>
-      </p:pic>
       <p:cxnSp>
         <p:nvCxnSpPr>
           <p:cNvPr id="6" name="Straight Connector 5">
@@ -4415,7 +4202,7 @@
         </p:nvCxnSpPr>
         <p:spPr>
           <a:xfrm>
-            <a:off x="7496355" y="3862668"/>
+            <a:off x="7254875" y="3569496"/>
             <a:ext cx="1466490" cy="0"/>
           </a:xfrm>
           <a:prstGeom prst="line">
@@ -4674,7 +4461,7 @@
         </p:nvSpPr>
         <p:spPr>
           <a:xfrm>
-            <a:off x="7764630" y="1714500"/>
+            <a:off x="7602457" y="2018703"/>
             <a:ext cx="2237728" cy="584775"/>
           </a:xfrm>
           <a:prstGeom prst="rect">
@@ -4806,8 +4593,8 @@
           </a:prstGeom>
         </p:spPr>
       </p:pic>
-      <mc:AlternateContent xmlns:mc="http://schemas.openxmlformats.org/markup-compatibility/2006">
-        <mc:Choice xmlns:a14="http://schemas.microsoft.com/office/drawing/2010/main" Requires="a14">
+      <mc:AlternateContent xmlns:mc="http://schemas.openxmlformats.org/markup-compatibility/2006" xmlns:a14="http://schemas.microsoft.com/office/drawing/2010/main">
+        <mc:Choice Requires="a14">
           <p:sp>
             <p:nvSpPr>
               <p:cNvPr id="28" name="TextBox 27">
@@ -4836,6 +4623,7 @@
               </a:bodyPr>
               <a:lstStyle/>
               <a:p>
+                <a:pPr/>
                 <a14:m>
                   <m:oMathPara xmlns:m="http://schemas.openxmlformats.org/officeDocument/2006/math">
                     <m:oMathParaPr>
@@ -4875,7 +4663,7 @@
             </p:txBody>
           </p:sp>
         </mc:Choice>
-        <mc:Fallback>
+        <mc:Fallback xmlns="">
           <p:sp>
             <p:nvSpPr>
               <p:cNvPr id="28" name="TextBox 27">
@@ -4920,8 +4708,8 @@
           </p:sp>
         </mc:Fallback>
       </mc:AlternateContent>
-      <mc:AlternateContent xmlns:mc="http://schemas.openxmlformats.org/markup-compatibility/2006">
-        <mc:Choice xmlns:a14="http://schemas.microsoft.com/office/drawing/2010/main" Requires="a14">
+      <mc:AlternateContent xmlns:mc="http://schemas.openxmlformats.org/markup-compatibility/2006" xmlns:a14="http://schemas.microsoft.com/office/drawing/2010/main">
+        <mc:Choice Requires="a14">
           <p:sp>
             <p:nvSpPr>
               <p:cNvPr id="29" name="TextBox 28">
@@ -4950,6 +4738,7 @@
               </a:bodyPr>
               <a:lstStyle/>
               <a:p>
+                <a:pPr/>
                 <a14:m>
                   <m:oMathPara xmlns:m="http://schemas.openxmlformats.org/officeDocument/2006/math">
                     <m:oMathParaPr>
@@ -4989,7 +4778,7 @@
             </p:txBody>
           </p:sp>
         </mc:Choice>
-        <mc:Fallback>
+        <mc:Fallback xmlns="">
           <p:sp>
             <p:nvSpPr>
               <p:cNvPr id="29" name="TextBox 28">
@@ -5034,8 +4823,8 @@
           </p:sp>
         </mc:Fallback>
       </mc:AlternateContent>
-      <mc:AlternateContent xmlns:mc="http://schemas.openxmlformats.org/markup-compatibility/2006">
-        <mc:Choice xmlns:a14="http://schemas.microsoft.com/office/drawing/2010/main" Requires="a14">
+      <mc:AlternateContent xmlns:mc="http://schemas.openxmlformats.org/markup-compatibility/2006" xmlns:a14="http://schemas.microsoft.com/office/drawing/2010/main">
+        <mc:Choice Requires="a14">
           <p:sp>
             <p:nvSpPr>
               <p:cNvPr id="30" name="TextBox 29">
@@ -5064,6 +4853,7 @@
               </a:bodyPr>
               <a:lstStyle/>
               <a:p>
+                <a:pPr/>
                 <a14:m>
                   <m:oMathPara xmlns:m="http://schemas.openxmlformats.org/officeDocument/2006/math">
                     <m:oMathParaPr>
@@ -5084,7 +4874,7 @@
             </p:txBody>
           </p:sp>
         </mc:Choice>
-        <mc:Fallback>
+        <mc:Fallback xmlns="">
           <p:sp>
             <p:nvSpPr>
               <p:cNvPr id="30" name="TextBox 29">
@@ -5129,8 +4919,8 @@
           </p:sp>
         </mc:Fallback>
       </mc:AlternateContent>
-      <mc:AlternateContent xmlns:mc="http://schemas.openxmlformats.org/markup-compatibility/2006">
-        <mc:Choice xmlns:a14="http://schemas.microsoft.com/office/drawing/2010/main" Requires="a14">
+      <mc:AlternateContent xmlns:mc="http://schemas.openxmlformats.org/markup-compatibility/2006" xmlns:a14="http://schemas.microsoft.com/office/drawing/2010/main">
+        <mc:Choice Requires="a14">
           <p:sp>
             <p:nvSpPr>
               <p:cNvPr id="31" name="TextBox 30">
@@ -5159,6 +4949,7 @@
               </a:bodyPr>
               <a:lstStyle/>
               <a:p>
+                <a:pPr/>
                 <a14:m>
                   <m:oMathPara xmlns:m="http://schemas.openxmlformats.org/officeDocument/2006/math">
                     <m:oMathParaPr>
@@ -5179,7 +4970,7 @@
             </p:txBody>
           </p:sp>
         </mc:Choice>
-        <mc:Fallback>
+        <mc:Fallback xmlns="">
           <p:sp>
             <p:nvSpPr>
               <p:cNvPr id="31" name="TextBox 30">
@@ -5224,8 +5015,8 @@
           </p:sp>
         </mc:Fallback>
       </mc:AlternateContent>
-      <mc:AlternateContent xmlns:mc="http://schemas.openxmlformats.org/markup-compatibility/2006">
-        <mc:Choice xmlns:a14="http://schemas.microsoft.com/office/drawing/2010/main" Requires="a14">
+      <mc:AlternateContent xmlns:mc="http://schemas.openxmlformats.org/markup-compatibility/2006" xmlns:a14="http://schemas.microsoft.com/office/drawing/2010/main">
+        <mc:Choice Requires="a14">
           <p:sp>
             <p:nvSpPr>
               <p:cNvPr id="32" name="TextBox 31">
@@ -5254,6 +5045,7 @@
               </a:bodyPr>
               <a:lstStyle/>
               <a:p>
+                <a:pPr/>
                 <a14:m>
                   <m:oMathPara xmlns:m="http://schemas.openxmlformats.org/officeDocument/2006/math">
                     <m:oMathParaPr>
@@ -5274,7 +5066,7 @@
             </p:txBody>
           </p:sp>
         </mc:Choice>
-        <mc:Fallback>
+        <mc:Fallback xmlns="">
           <p:sp>
             <p:nvSpPr>
               <p:cNvPr id="32" name="TextBox 31">
@@ -5319,8 +5111,8 @@
           </p:sp>
         </mc:Fallback>
       </mc:AlternateContent>
-      <mc:AlternateContent xmlns:mc="http://schemas.openxmlformats.org/markup-compatibility/2006">
-        <mc:Choice xmlns:a14="http://schemas.microsoft.com/office/drawing/2010/main" Requires="a14">
+      <mc:AlternateContent xmlns:mc="http://schemas.openxmlformats.org/markup-compatibility/2006" xmlns:a14="http://schemas.microsoft.com/office/drawing/2010/main">
+        <mc:Choice Requires="a14">
           <p:sp>
             <p:nvSpPr>
               <p:cNvPr id="33" name="TextBox 32">
@@ -5349,6 +5141,7 @@
               </a:bodyPr>
               <a:lstStyle/>
               <a:p>
+                <a:pPr/>
                 <a14:m>
                   <m:oMathPara xmlns:m="http://schemas.openxmlformats.org/officeDocument/2006/math">
                     <m:oMathParaPr>
@@ -5378,7 +5171,7 @@
             </p:txBody>
           </p:sp>
         </mc:Choice>
-        <mc:Fallback>
+        <mc:Fallback xmlns="">
           <p:sp>
             <p:nvSpPr>
               <p:cNvPr id="33" name="TextBox 32">
